--- a/納品レポート/ホテル別レポート/アパホテル相模原橋本駅東_口コミ分析レポート.pptx
+++ b/納品レポート/ホテル別レポート/アパホテル相模原橋本駅東_口コミ分析レポート.pptx
@@ -180,22 +180,22 @@
                 <c:ptCount val="6"/>
                 <c:lvl>
                   <c:pt idx="0">
-                    <c:v>じゃらん</c:v>
+                    <c:v>Google</c:v>
                   </c:pt>
                   <c:pt idx="1">
-                    <c:v>Google</c:v>
+                    <c:v>Agoda</c:v>
                   </c:pt>
                   <c:pt idx="2">
-                    <c:v>Trip.com</c:v>
+                    <c:v>じゃらん</c:v>
                   </c:pt>
                   <c:pt idx="3">
                     <c:v>Booking.com</c:v>
                   </c:pt>
                   <c:pt idx="4">
-                    <c:v>Agoda</c:v>
+                    <c:v>楽天トラベル</c:v>
                   </c:pt>
                   <c:pt idx="5">
-                    <c:v>楽天トラベル</c:v>
+                    <c:v>Trip.com</c:v>
                   </c:pt>
                 </c:lvl>
               </c:multiLvlStrCache>
@@ -208,22 +208,22 @@
                 <c:formatCode>General</c:formatCode>
                 <c:ptCount val="6"/>
                 <c:pt idx="0">
-                  <c:v>8.91</c:v>
+                  <c:v>8.67</c:v>
                 </c:pt>
                 <c:pt idx="1">
-                  <c:v>8.75</c:v>
+                  <c:v>8.17</c:v>
                 </c:pt>
                 <c:pt idx="2">
-                  <c:v>8.67</c:v>
+                  <c:v>8</c:v>
                 </c:pt>
                 <c:pt idx="3">
-                  <c:v>8</c:v>
+                  <c:v>7.89</c:v>
                 </c:pt>
                 <c:pt idx="4">
-                  <c:v>7.88</c:v>
+                  <c:v>7.67</c:v>
                 </c:pt>
                 <c:pt idx="5">
-                  <c:v>7.88</c:v>
+                  <c:v>6</c:v>
                 </c:pt>
               </c:numCache>
             </c:numRef>
@@ -528,10 +528,10 @@
               <c:numCache>
                 <c:ptCount val="2"/>
                 <c:pt idx="0">
-                  <c:v>49</c:v>
+                  <c:v>20</c:v>
                 </c:pt>
                 <c:pt idx="1">
-                  <c:v>18</c:v>
+                  <c:v>10</c:v>
                 </c:pt>
               </c:numCache>
             </c:numRef>
@@ -694,33 +694,11 @@
               <a:effectLst/>
             </c:spPr>
           </c:dPt>
-          <c:dPt>
-            <c:idx val="5"/>
-            <c:invertIfNegative val="0"/>
-            <c:bubble3D val="0"/>
-            <c:spPr>
-              <a:solidFill>
-                <a:srgbClr val="D4A843"/>
-              </a:solidFill>
-              <a:effectLst/>
-            </c:spPr>
-          </c:dPt>
-          <c:dPt>
-            <c:idx val="6"/>
-            <c:invertIfNegative val="0"/>
-            <c:bubble3D val="0"/>
-            <c:spPr>
-              <a:solidFill>
-                <a:srgbClr val="16A34A"/>
-              </a:solidFill>
-              <a:effectLst/>
-            </c:spPr>
-          </c:dPt>
           <c:cat>
             <c:multiLvlStrRef>
-              <c:f>Sheet1!$A$2:$A$8</c:f>
+              <c:f>Sheet1!$A$2:$A$6</c:f>
               <c:multiLvlStrCache>
-                <c:ptCount val="7"/>
+                <c:ptCount val="5"/>
                 <c:lvl>
                   <c:pt idx="0">
                     <c:v>10点</c:v>
@@ -737,42 +715,30 @@
                   <c:pt idx="4">
                     <c:v>6点</c:v>
                   </c:pt>
-                  <c:pt idx="5">
-                    <c:v>5点</c:v>
-                  </c:pt>
-                  <c:pt idx="6">
-                    <c:v>4点</c:v>
-                  </c:pt>
                 </c:lvl>
               </c:multiLvlStrCache>
             </c:multiLvlStrRef>
           </c:cat>
           <c:val>
             <c:numRef>
-              <c:f>Sheet1!$B$2:$B$8</c:f>
+              <c:f>Sheet1!$B$2:$B$6</c:f>
               <c:numCache>
                 <c:formatCode>General</c:formatCode>
-                <c:ptCount val="7"/>
+                <c:ptCount val="5"/>
                 <c:pt idx="0">
-                  <c:v>22</c:v>
+                  <c:v>6</c:v>
                 </c:pt>
                 <c:pt idx="1">
+                  <c:v>3</c:v>
+                </c:pt>
+                <c:pt idx="2">
+                  <c:v>11</c:v>
+                </c:pt>
+                <c:pt idx="3">
                   <c:v>5</c:v>
                 </c:pt>
-                <c:pt idx="2">
-                  <c:v>22</c:v>
-                </c:pt>
-                <c:pt idx="3">
-                  <c:v>8</c:v>
-                </c:pt>
                 <c:pt idx="4">
-                  <c:v>8</c:v>
-                </c:pt>
-                <c:pt idx="5">
-                  <c:v>2</c:v>
-                </c:pt>
-                <c:pt idx="6">
-                  <c:v>1</c:v>
+                  <c:v>5</c:v>
                 </c:pt>
               </c:numCache>
             </c:numRef>
@@ -2703,7 +2669,7 @@
                 <a:ea typeface="Arial" pitchFamily="34" charset="-122"/>
                 <a:cs typeface="Arial" pitchFamily="34" charset="-120"/>
               </a:rPr>
-              <a:t>分析対象期間：2025年12月〜2026年3月</a:t>
+              <a:t>分析対象期間：2025年12月〜2026年4月</a:t>
             </a:r>
             <a:endParaRPr lang="en-US" sz="1000" dirty="0"/>
           </a:p>
@@ -2723,7 +2689,7 @@
                 <a:ea typeface="Arial" pitchFamily="34" charset="-122"/>
                 <a:cs typeface="Arial" pitchFamily="34" charset="-120"/>
               </a:rPr>
-              <a:t>レビュー総数：68件</a:t>
+              <a:t>レビュー総数：30件</a:t>
             </a:r>
             <a:endParaRPr lang="en-US" sz="1000" dirty="0"/>
           </a:p>
@@ -2743,7 +2709,7 @@
                 <a:ea typeface="Arial" pitchFamily="34" charset="-122"/>
                 <a:cs typeface="Arial" pitchFamily="34" charset="-120"/>
               </a:rPr>
-              <a:t>作成日：2026年4月3日</a:t>
+              <a:t>作成日：2026年4月12日</a:t>
             </a:r>
             <a:endParaRPr lang="en-US" sz="1000" dirty="0"/>
           </a:p>
@@ -2922,7 +2888,7 @@
                 <a:ea typeface="Arial" pitchFamily="34" charset="-122"/>
                 <a:cs typeface="Arial" pitchFamily="34" charset="-120"/>
               </a:rPr>
-              <a:t>アパホテル相模原橋本駅東の2025年12月〜2026年3月口コミ分析（68件）では、総合評価8.22点（10pt換算）、高評価率72.1%という結果が得られました。</a:t>
+              <a:t>アパホテル相模原橋本駅東の2025年12月〜2026年4月口コミ分析（30件）では、総合評価8.00点（10pt換算）、高評価率66.7%という結果が得られました。</a:t>
             </a:r>
             <a:endParaRPr lang="en-US" sz="1200" dirty="0"/>
           </a:p>
@@ -2980,7 +2946,7 @@
                 <a:ea typeface="Arial" pitchFamily="34" charset="-122"/>
                 <a:cs typeface="Arial" pitchFamily="34" charset="-120"/>
               </a:rPr>
-              <a:t>6ヶ月以内に全体平均8.5点以上、高評価率77%以上を目指し、継続的な改善サイクルを確立することを推奨します。</a:t>
+              <a:t>6ヶ月以内に全体平均8.3点以上、高評価率72%以上を目指し、継続的な改善サイクルを確立することを推奨します。</a:t>
             </a:r>
             <a:endParaRPr lang="en-US" sz="1200" dirty="0"/>
           </a:p>
@@ -3326,7 +3292,7 @@
                 <a:ea typeface="Arial" pitchFamily="34" charset="-122"/>
                 <a:cs typeface="Arial" pitchFamily="34" charset="-120"/>
               </a:rPr>
-              <a:t>8.22</a:t>
+              <a:t>8.00</a:t>
             </a:r>
             <a:endParaRPr lang="en-US" sz="3200" dirty="0"/>
           </a:p>
@@ -3451,7 +3417,7 @@
                 <a:ea typeface="Arial" pitchFamily="34" charset="-122"/>
                 <a:cs typeface="Arial" pitchFamily="34" charset="-120"/>
               </a:rPr>
-              <a:t>72.1%</a:t>
+              <a:t>66.7%</a:t>
             </a:r>
             <a:endParaRPr lang="en-US" sz="3200" dirty="0"/>
           </a:p>
@@ -3576,7 +3542,7 @@
                 <a:ea typeface="Arial" pitchFamily="34" charset="-122"/>
                 <a:cs typeface="Arial" pitchFamily="34" charset="-120"/>
               </a:rPr>
-              <a:t>1.5%</a:t>
+              <a:t>0.0%</a:t>
             </a:r>
             <a:endParaRPr lang="en-US" sz="3200" dirty="0"/>
           </a:p>
@@ -3701,7 +3667,7 @@
                 <a:ea typeface="Arial" pitchFamily="34" charset="-122"/>
                 <a:cs typeface="Arial" pitchFamily="34" charset="-120"/>
               </a:rPr>
-              <a:t>68件</a:t>
+              <a:t>30件</a:t>
             </a:r>
             <a:endParaRPr lang="en-US" sz="3200" dirty="0"/>
           </a:p>
@@ -3849,47 +3815,7 @@
                 <a:ea typeface="Arial" pitchFamily="34" charset="-122"/>
                 <a:cs typeface="Arial" pitchFamily="34" charset="-120"/>
               </a:rPr>
-              <a:t>  客室の快適性・設備の充実度への好評（52件）</a:t>
-            </a:r>
-            <a:endParaRPr lang="en-US" sz="1100" dirty="0"/>
-          </a:p>
-          <a:p>
-            <a:pPr indent="0" marL="0">
-              <a:spcAft>
-                <a:spcPts val="200"/>
-              </a:spcAft>
-              <a:buNone/>
-            </a:pPr>
-            <a:r>
-              <a:rPr lang="en-US" sz="1100" b="1" dirty="0">
-                <a:solidFill>
-                  <a:srgbClr val="334155"/>
-                </a:solidFill>
-                <a:latin typeface="Arial" pitchFamily="34" charset="0"/>
-                <a:ea typeface="Arial" pitchFamily="34" charset="-122"/>
-                <a:cs typeface="Arial" pitchFamily="34" charset="-120"/>
-              </a:rPr>
-              <a:t>スタッフ対応 </a:t>
-            </a:r>
-            <a:endParaRPr lang="en-US" sz="1100" dirty="0"/>
-          </a:p>
-          <a:p>
-            <a:pPr indent="0" marL="0">
-              <a:spcAft>
-                <a:spcPts val="200"/>
-              </a:spcAft>
-              <a:buNone/>
-            </a:pPr>
-            <a:r>
-              <a:rPr lang="en-US" sz="900" dirty="0">
-                <a:solidFill>
-                  <a:srgbClr val="64748B"/>
-                </a:solidFill>
-                <a:latin typeface="Arial" pitchFamily="34" charset="0"/>
-                <a:ea typeface="Arial" pitchFamily="34" charset="-122"/>
-                <a:cs typeface="Arial" pitchFamily="34" charset="-120"/>
-              </a:rPr>
-              <a:t>  フロントスタッフの丁寧な対応への好評（35件）</a:t>
+              <a:t>  客室の快適性・設備の充実度への好評（19件）</a:t>
             </a:r>
             <a:endParaRPr lang="en-US" sz="1100" dirty="0"/>
           </a:p>
@@ -3929,7 +3855,47 @@
                 <a:ea typeface="Arial" pitchFamily="34" charset="-122"/>
                 <a:cs typeface="Arial" pitchFamily="34" charset="-120"/>
               </a:rPr>
-              <a:t>  駅近・交通利便性に関する好評価（29件）</a:t>
+              <a:t>  駅近・交通利便性に関する好評価（18件）</a:t>
+            </a:r>
+            <a:endParaRPr lang="en-US" sz="1100" dirty="0"/>
+          </a:p>
+          <a:p>
+            <a:pPr indent="0" marL="0">
+              <a:spcAft>
+                <a:spcPts val="200"/>
+              </a:spcAft>
+              <a:buNone/>
+            </a:pPr>
+            <a:r>
+              <a:rPr lang="en-US" sz="1100" b="1" dirty="0">
+                <a:solidFill>
+                  <a:srgbClr val="334155"/>
+                </a:solidFill>
+                <a:latin typeface="Arial" pitchFamily="34" charset="0"/>
+                <a:ea typeface="Arial" pitchFamily="34" charset="-122"/>
+                <a:cs typeface="Arial" pitchFamily="34" charset="-120"/>
+              </a:rPr>
+              <a:t>清潔感 </a:t>
+            </a:r>
+            <a:endParaRPr lang="en-US" sz="1100" dirty="0"/>
+          </a:p>
+          <a:p>
+            <a:pPr indent="0" marL="0">
+              <a:spcAft>
+                <a:spcPts val="200"/>
+              </a:spcAft>
+              <a:buNone/>
+            </a:pPr>
+            <a:r>
+              <a:rPr lang="en-US" sz="900" dirty="0">
+                <a:solidFill>
+                  <a:srgbClr val="64748B"/>
+                </a:solidFill>
+                <a:latin typeface="Arial" pitchFamily="34" charset="0"/>
+                <a:ea typeface="Arial" pitchFamily="34" charset="-122"/>
+                <a:cs typeface="Arial" pitchFamily="34" charset="-120"/>
+              </a:rPr>
+              <a:t>  客室・共用部の清潔さへの高評価（15件）</a:t>
             </a:r>
             <a:endParaRPr lang="en-US" sz="1100" dirty="0"/>
           </a:p>
@@ -4057,7 +4023,7 @@
                 <a:ea typeface="Arial" pitchFamily="34" charset="-122"/>
                 <a:cs typeface="Arial" pitchFamily="34" charset="-120"/>
               </a:rPr>
-              <a:t>騒音問題 </a:t>
+              <a:t>口コミ返信率 </a:t>
             </a:r>
             <a:endParaRPr lang="en-US" sz="1100" dirty="0"/>
           </a:p>
@@ -4077,7 +4043,7 @@
                 <a:ea typeface="Arial" pitchFamily="34" charset="-122"/>
                 <a:cs typeface="Arial" pitchFamily="34" charset="-120"/>
               </a:rPr>
-              <a:t>  2件の指摘あり。改善対応を推奨</a:t>
+              <a:t>  継続的な品質管理・予防的対応を推奨</a:t>
             </a:r>
             <a:endParaRPr lang="en-US" sz="1100" dirty="0"/>
           </a:p>
@@ -4097,7 +4063,7 @@
                 <a:ea typeface="Arial" pitchFamily="34" charset="-122"/>
                 <a:cs typeface="Arial" pitchFamily="34" charset="-120"/>
               </a:rPr>
-              <a:t>水回り </a:t>
+              <a:t>サービス改善 </a:t>
             </a:r>
             <a:endParaRPr lang="en-US" sz="1100" dirty="0"/>
           </a:p>
@@ -4117,7 +4083,7 @@
                 <a:ea typeface="Arial" pitchFamily="34" charset="-122"/>
                 <a:cs typeface="Arial" pitchFamily="34" charset="-120"/>
               </a:rPr>
-              <a:t>  2件の指摘あり。改善対応を推奨</a:t>
+              <a:t>  継続的な品質管理・予防的対応を推奨</a:t>
             </a:r>
             <a:endParaRPr lang="en-US" sz="1100" dirty="0"/>
           </a:p>
@@ -4137,7 +4103,7 @@
                 <a:ea typeface="Arial" pitchFamily="34" charset="-122"/>
                 <a:cs typeface="Arial" pitchFamily="34" charset="-120"/>
               </a:rPr>
-              <a:t>口コミ返信率 </a:t>
+              <a:t>設備メンテナンス </a:t>
             </a:r>
             <a:endParaRPr lang="en-US" sz="1100" dirty="0"/>
           </a:p>
@@ -4578,7 +4544,7 @@
                 <a:ea typeface="Arial" pitchFamily="34" charset="-122"/>
                 <a:cs typeface="Arial" pitchFamily="34" charset="-120"/>
               </a:rPr>
-              <a:t>じゃらん: 8.91点</a:t>
+              <a:t>Google: 8.67点</a:t>
             </a:r>
             <a:endParaRPr lang="en-US" sz="1100" dirty="0"/>
           </a:p>
@@ -4627,7 +4593,7 @@
                 <a:ea typeface="Arial" pitchFamily="34" charset="-122"/>
                 <a:cs typeface="Arial" pitchFamily="34" charset="-120"/>
               </a:rPr>
-              <a:t>8.22点（10pt換算）</a:t>
+              <a:t>8.00点（10pt換算）</a:t>
             </a:r>
             <a:endParaRPr lang="en-US" sz="1100" dirty="0"/>
           </a:p>
@@ -5068,7 +5034,7 @@
                           <a:ea typeface="Arial" pitchFamily="34" charset="-122"/>
                           <a:cs typeface="Arial" pitchFamily="34" charset="-120"/>
                         </a:rPr>
-                        <a:t>じゃらん</a:t>
+                        <a:t>Google</a:t>
                       </a:r>
                       <a:endParaRPr lang="en-US" sz="900" dirty="0">
                         <a:latin typeface="Arial" charset="0"/>
@@ -5136,7 +5102,7 @@
                           <a:ea typeface="Arial" pitchFamily="34" charset="-122"/>
                           <a:cs typeface="Arial" pitchFamily="34" charset="-120"/>
                         </a:rPr>
-                        <a:t>11</a:t>
+                        <a:t>6</a:t>
                       </a:r>
                       <a:endParaRPr lang="en-US" sz="900" dirty="0">
                         <a:latin typeface="Arial" charset="0"/>
@@ -5204,7 +5170,7 @@
                           <a:ea typeface="Arial" pitchFamily="34" charset="-122"/>
                           <a:cs typeface="Arial" pitchFamily="34" charset="-120"/>
                         </a:rPr>
-                        <a:t>4.45</a:t>
+                        <a:t>4.33</a:t>
                       </a:r>
                       <a:endParaRPr lang="en-US" sz="900" dirty="0">
                         <a:latin typeface="Arial" charset="0"/>
@@ -5340,7 +5306,7 @@
                           <a:ea typeface="Arial" pitchFamily="34" charset="-122"/>
                           <a:cs typeface="Arial" pitchFamily="34" charset="-120"/>
                         </a:rPr>
-                        <a:t>8.91</a:t>
+                        <a:t>8.67</a:t>
                       </a:r>
                       <a:endParaRPr lang="en-US" sz="900" dirty="0">
                         <a:latin typeface="Arial" charset="0"/>
@@ -5410,7 +5376,7 @@
                           <a:ea typeface="Arial" pitchFamily="34" charset="-122"/>
                           <a:cs typeface="Arial" pitchFamily="34" charset="-120"/>
                         </a:rPr>
-                        <a:t>Google</a:t>
+                        <a:t>Agoda</a:t>
                       </a:r>
                       <a:endParaRPr lang="en-US" sz="900" dirty="0">
                         <a:latin typeface="Arial" charset="0"/>
@@ -5478,7 +5444,7 @@
                           <a:ea typeface="Arial" pitchFamily="34" charset="-122"/>
                           <a:cs typeface="Arial" pitchFamily="34" charset="-120"/>
                         </a:rPr>
-                        <a:t>8</a:t>
+                        <a:t>6</a:t>
                       </a:r>
                       <a:endParaRPr lang="en-US" sz="900" dirty="0">
                         <a:latin typeface="Arial" charset="0"/>
@@ -5546,7 +5512,7 @@
                           <a:ea typeface="Arial" pitchFamily="34" charset="-122"/>
                           <a:cs typeface="Arial" pitchFamily="34" charset="-120"/>
                         </a:rPr>
-                        <a:t>4.38</a:t>
+                        <a:t>8.17</a:t>
                       </a:r>
                       <a:endParaRPr lang="en-US" sz="900" dirty="0">
                         <a:latin typeface="Arial" charset="0"/>
@@ -5594,6 +5560,348 @@
                     </a:lnB>
                     <a:solidFill>
                       <a:srgbClr val="FFFFFF"/>
+                    </a:solidFill>
+                  </a:tcPr>
+                </a:tc>
+                <a:tc>
+                  <a:txBody>
+                    <a:bodyPr/>
+                    <a:lstStyle/>
+                    <a:p>
+                      <a:pPr algn="ctr" indent="0" marL="0">
+                        <a:buNone/>
+                      </a:pPr>
+                      <a:r>
+                        <a:rPr lang="en-US" sz="900" dirty="0">
+                          <a:solidFill>
+                            <a:srgbClr val="000000"/>
+                          </a:solidFill>
+                          <a:latin typeface="Arial" pitchFamily="34" charset="0"/>
+                          <a:ea typeface="Arial" pitchFamily="34" charset="-122"/>
+                          <a:cs typeface="Arial" pitchFamily="34" charset="-120"/>
+                        </a:rPr>
+                        <a:t>/10</a:t>
+                      </a:r>
+                      <a:endParaRPr lang="en-US" sz="900" dirty="0">
+                        <a:latin typeface="Arial" charset="0"/>
+                        <a:ea typeface="Arial" charset="0"/>
+                        <a:cs typeface="Arial" charset="0"/>
+                      </a:endParaRPr>
+                    </a:p>
+                  </a:txBody>
+                  <a:tcPr marL="91440" marR="91440" marT="45720" marB="45720">
+                    <a:lnL w="6350" cap="flat" cmpd="sng" algn="ctr">
+                      <a:solidFill>
+                        <a:srgbClr val="CBD5E1"/>
+                      </a:solidFill>
+                      <a:prstDash val="solid"/>
+                      <a:round/>
+                      <a:headEnd type="none" w="med" len="med"/>
+                      <a:tailEnd type="none" w="med" len="med"/>
+                    </a:lnL>
+                    <a:lnR w="6350" cap="flat" cmpd="sng" algn="ctr">
+                      <a:solidFill>
+                        <a:srgbClr val="CBD5E1"/>
+                      </a:solidFill>
+                      <a:prstDash val="solid"/>
+                      <a:round/>
+                      <a:headEnd type="none" w="med" len="med"/>
+                      <a:tailEnd type="none" w="med" len="med"/>
+                    </a:lnR>
+                    <a:lnT w="6350" cap="flat" cmpd="sng" algn="ctr">
+                      <a:solidFill>
+                        <a:srgbClr val="CBD5E1"/>
+                      </a:solidFill>
+                      <a:prstDash val="solid"/>
+                      <a:round/>
+                      <a:headEnd type="none" w="med" len="med"/>
+                      <a:tailEnd type="none" w="med" len="med"/>
+                    </a:lnT>
+                    <a:lnB w="6350" cap="flat" cmpd="sng" algn="ctr">
+                      <a:solidFill>
+                        <a:srgbClr val="CBD5E1"/>
+                      </a:solidFill>
+                      <a:prstDash val="solid"/>
+                      <a:round/>
+                      <a:headEnd type="none" w="med" len="med"/>
+                      <a:tailEnd type="none" w="med" len="med"/>
+                    </a:lnB>
+                    <a:solidFill>
+                      <a:srgbClr val="FFFFFF"/>
+                    </a:solidFill>
+                  </a:tcPr>
+                </a:tc>
+                <a:tc>
+                  <a:txBody>
+                    <a:bodyPr/>
+                    <a:lstStyle/>
+                    <a:p>
+                      <a:pPr algn="ctr" indent="0" marL="0">
+                        <a:buNone/>
+                      </a:pPr>
+                      <a:r>
+                        <a:rPr lang="en-US" sz="900" dirty="0">
+                          <a:solidFill>
+                            <a:srgbClr val="000000"/>
+                          </a:solidFill>
+                          <a:latin typeface="Arial" pitchFamily="34" charset="0"/>
+                          <a:ea typeface="Arial" pitchFamily="34" charset="-122"/>
+                          <a:cs typeface="Arial" pitchFamily="34" charset="-120"/>
+                        </a:rPr>
+                        <a:t>8.17</a:t>
+                      </a:r>
+                      <a:endParaRPr lang="en-US" sz="900" dirty="0">
+                        <a:latin typeface="Arial" charset="0"/>
+                        <a:ea typeface="Arial" charset="0"/>
+                        <a:cs typeface="Arial" charset="0"/>
+                      </a:endParaRPr>
+                    </a:p>
+                  </a:txBody>
+                  <a:tcPr marL="91440" marR="91440" marT="45720" marB="45720">
+                    <a:lnL w="6350" cap="flat" cmpd="sng" algn="ctr">
+                      <a:solidFill>
+                        <a:srgbClr val="CBD5E1"/>
+                      </a:solidFill>
+                      <a:prstDash val="solid"/>
+                      <a:round/>
+                      <a:headEnd type="none" w="med" len="med"/>
+                      <a:tailEnd type="none" w="med" len="med"/>
+                    </a:lnL>
+                    <a:lnR w="6350" cap="flat" cmpd="sng" algn="ctr">
+                      <a:solidFill>
+                        <a:srgbClr val="CBD5E1"/>
+                      </a:solidFill>
+                      <a:prstDash val="solid"/>
+                      <a:round/>
+                      <a:headEnd type="none" w="med" len="med"/>
+                      <a:tailEnd type="none" w="med" len="med"/>
+                    </a:lnR>
+                    <a:lnT w="6350" cap="flat" cmpd="sng" algn="ctr">
+                      <a:solidFill>
+                        <a:srgbClr val="CBD5E1"/>
+                      </a:solidFill>
+                      <a:prstDash val="solid"/>
+                      <a:round/>
+                      <a:headEnd type="none" w="med" len="med"/>
+                      <a:tailEnd type="none" w="med" len="med"/>
+                    </a:lnT>
+                    <a:lnB w="6350" cap="flat" cmpd="sng" algn="ctr">
+                      <a:solidFill>
+                        <a:srgbClr val="CBD5E1"/>
+                      </a:solidFill>
+                      <a:prstDash val="solid"/>
+                      <a:round/>
+                      <a:headEnd type="none" w="med" len="med"/>
+                      <a:tailEnd type="none" w="med" len="med"/>
+                    </a:lnB>
+                    <a:solidFill>
+                      <a:srgbClr val="FFFFFF"/>
+                    </a:solidFill>
+                  </a:tcPr>
+                </a:tc>
+              </a:tr>
+              <a:tr h="201168">
+                <a:tc>
+                  <a:txBody>
+                    <a:bodyPr/>
+                    <a:lstStyle/>
+                    <a:p>
+                      <a:pPr algn="ctr" indent="0" marL="0">
+                        <a:buNone/>
+                      </a:pPr>
+                      <a:r>
+                        <a:rPr lang="en-US" sz="900" dirty="0">
+                          <a:solidFill>
+                            <a:srgbClr val="000000"/>
+                          </a:solidFill>
+                          <a:latin typeface="Arial" pitchFamily="34" charset="0"/>
+                          <a:ea typeface="Arial" pitchFamily="34" charset="-122"/>
+                          <a:cs typeface="Arial" pitchFamily="34" charset="-120"/>
+                        </a:rPr>
+                        <a:t>じゃらん</a:t>
+                      </a:r>
+                      <a:endParaRPr lang="en-US" sz="900" dirty="0">
+                        <a:latin typeface="Arial" charset="0"/>
+                        <a:ea typeface="Arial" charset="0"/>
+                        <a:cs typeface="Arial" charset="0"/>
+                      </a:endParaRPr>
+                    </a:p>
+                  </a:txBody>
+                  <a:tcPr marL="91440" marR="91440" marT="45720" marB="45720">
+                    <a:lnL w="6350" cap="flat" cmpd="sng" algn="ctr">
+                      <a:solidFill>
+                        <a:srgbClr val="CBD5E1"/>
+                      </a:solidFill>
+                      <a:prstDash val="solid"/>
+                      <a:round/>
+                      <a:headEnd type="none" w="med" len="med"/>
+                      <a:tailEnd type="none" w="med" len="med"/>
+                    </a:lnL>
+                    <a:lnR w="6350" cap="flat" cmpd="sng" algn="ctr">
+                      <a:solidFill>
+                        <a:srgbClr val="CBD5E1"/>
+                      </a:solidFill>
+                      <a:prstDash val="solid"/>
+                      <a:round/>
+                      <a:headEnd type="none" w="med" len="med"/>
+                      <a:tailEnd type="none" w="med" len="med"/>
+                    </a:lnR>
+                    <a:lnT w="6350" cap="flat" cmpd="sng" algn="ctr">
+                      <a:solidFill>
+                        <a:srgbClr val="CBD5E1"/>
+                      </a:solidFill>
+                      <a:prstDash val="solid"/>
+                      <a:round/>
+                      <a:headEnd type="none" w="med" len="med"/>
+                      <a:tailEnd type="none" w="med" len="med"/>
+                    </a:lnT>
+                    <a:lnB w="6350" cap="flat" cmpd="sng" algn="ctr">
+                      <a:solidFill>
+                        <a:srgbClr val="CBD5E1"/>
+                      </a:solidFill>
+                      <a:prstDash val="solid"/>
+                      <a:round/>
+                      <a:headEnd type="none" w="med" len="med"/>
+                      <a:tailEnd type="none" w="med" len="med"/>
+                    </a:lnB>
+                    <a:solidFill>
+                      <a:srgbClr val="E8EFF8"/>
+                    </a:solidFill>
+                  </a:tcPr>
+                </a:tc>
+                <a:tc>
+                  <a:txBody>
+                    <a:bodyPr/>
+                    <a:lstStyle/>
+                    <a:p>
+                      <a:pPr algn="ctr" indent="0" marL="0">
+                        <a:buNone/>
+                      </a:pPr>
+                      <a:r>
+                        <a:rPr lang="en-US" sz="900" dirty="0">
+                          <a:solidFill>
+                            <a:srgbClr val="000000"/>
+                          </a:solidFill>
+                          <a:latin typeface="Arial" pitchFamily="34" charset="0"/>
+                          <a:ea typeface="Arial" pitchFamily="34" charset="-122"/>
+                          <a:cs typeface="Arial" pitchFamily="34" charset="-120"/>
+                        </a:rPr>
+                        <a:t>2</a:t>
+                      </a:r>
+                      <a:endParaRPr lang="en-US" sz="900" dirty="0">
+                        <a:latin typeface="Arial" charset="0"/>
+                        <a:ea typeface="Arial" charset="0"/>
+                        <a:cs typeface="Arial" charset="0"/>
+                      </a:endParaRPr>
+                    </a:p>
+                  </a:txBody>
+                  <a:tcPr marL="91440" marR="91440" marT="45720" marB="45720">
+                    <a:lnL w="6350" cap="flat" cmpd="sng" algn="ctr">
+                      <a:solidFill>
+                        <a:srgbClr val="CBD5E1"/>
+                      </a:solidFill>
+                      <a:prstDash val="solid"/>
+                      <a:round/>
+                      <a:headEnd type="none" w="med" len="med"/>
+                      <a:tailEnd type="none" w="med" len="med"/>
+                    </a:lnL>
+                    <a:lnR w="6350" cap="flat" cmpd="sng" algn="ctr">
+                      <a:solidFill>
+                        <a:srgbClr val="CBD5E1"/>
+                      </a:solidFill>
+                      <a:prstDash val="solid"/>
+                      <a:round/>
+                      <a:headEnd type="none" w="med" len="med"/>
+                      <a:tailEnd type="none" w="med" len="med"/>
+                    </a:lnR>
+                    <a:lnT w="6350" cap="flat" cmpd="sng" algn="ctr">
+                      <a:solidFill>
+                        <a:srgbClr val="CBD5E1"/>
+                      </a:solidFill>
+                      <a:prstDash val="solid"/>
+                      <a:round/>
+                      <a:headEnd type="none" w="med" len="med"/>
+                      <a:tailEnd type="none" w="med" len="med"/>
+                    </a:lnT>
+                    <a:lnB w="6350" cap="flat" cmpd="sng" algn="ctr">
+                      <a:solidFill>
+                        <a:srgbClr val="CBD5E1"/>
+                      </a:solidFill>
+                      <a:prstDash val="solid"/>
+                      <a:round/>
+                      <a:headEnd type="none" w="med" len="med"/>
+                      <a:tailEnd type="none" w="med" len="med"/>
+                    </a:lnB>
+                    <a:solidFill>
+                      <a:srgbClr val="E8EFF8"/>
+                    </a:solidFill>
+                  </a:tcPr>
+                </a:tc>
+                <a:tc>
+                  <a:txBody>
+                    <a:bodyPr/>
+                    <a:lstStyle/>
+                    <a:p>
+                      <a:pPr algn="ctr" indent="0" marL="0">
+                        <a:buNone/>
+                      </a:pPr>
+                      <a:r>
+                        <a:rPr lang="en-US" sz="900" dirty="0">
+                          <a:solidFill>
+                            <a:srgbClr val="000000"/>
+                          </a:solidFill>
+                          <a:latin typeface="Arial" pitchFamily="34" charset="0"/>
+                          <a:ea typeface="Arial" pitchFamily="34" charset="-122"/>
+                          <a:cs typeface="Arial" pitchFamily="34" charset="-120"/>
+                        </a:rPr>
+                        <a:t>4.00</a:t>
+                      </a:r>
+                      <a:endParaRPr lang="en-US" sz="900" dirty="0">
+                        <a:latin typeface="Arial" charset="0"/>
+                        <a:ea typeface="Arial" charset="0"/>
+                        <a:cs typeface="Arial" charset="0"/>
+                      </a:endParaRPr>
+                    </a:p>
+                  </a:txBody>
+                  <a:tcPr marL="91440" marR="91440" marT="45720" marB="45720">
+                    <a:lnL w="6350" cap="flat" cmpd="sng" algn="ctr">
+                      <a:solidFill>
+                        <a:srgbClr val="CBD5E1"/>
+                      </a:solidFill>
+                      <a:prstDash val="solid"/>
+                      <a:round/>
+                      <a:headEnd type="none" w="med" len="med"/>
+                      <a:tailEnd type="none" w="med" len="med"/>
+                    </a:lnL>
+                    <a:lnR w="6350" cap="flat" cmpd="sng" algn="ctr">
+                      <a:solidFill>
+                        <a:srgbClr val="CBD5E1"/>
+                      </a:solidFill>
+                      <a:prstDash val="solid"/>
+                      <a:round/>
+                      <a:headEnd type="none" w="med" len="med"/>
+                      <a:tailEnd type="none" w="med" len="med"/>
+                    </a:lnR>
+                    <a:lnT w="6350" cap="flat" cmpd="sng" algn="ctr">
+                      <a:solidFill>
+                        <a:srgbClr val="CBD5E1"/>
+                      </a:solidFill>
+                      <a:prstDash val="solid"/>
+                      <a:round/>
+                      <a:headEnd type="none" w="med" len="med"/>
+                      <a:tailEnd type="none" w="med" len="med"/>
+                    </a:lnT>
+                    <a:lnB w="6350" cap="flat" cmpd="sng" algn="ctr">
+                      <a:solidFill>
+                        <a:srgbClr val="CBD5E1"/>
+                      </a:solidFill>
+                      <a:prstDash val="solid"/>
+                      <a:round/>
+                      <a:headEnd type="none" w="med" len="med"/>
+                      <a:tailEnd type="none" w="med" len="med"/>
+                    </a:lnB>
+                    <a:solidFill>
+                      <a:srgbClr val="E8EFF8"/>
                     </a:solidFill>
                   </a:tcPr>
                 </a:tc>
@@ -5661,144 +5969,6 @@
                       <a:tailEnd type="none" w="med" len="med"/>
                     </a:lnB>
                     <a:solidFill>
-                      <a:srgbClr val="FFFFFF"/>
-                    </a:solidFill>
-                  </a:tcPr>
-                </a:tc>
-                <a:tc>
-                  <a:txBody>
-                    <a:bodyPr/>
-                    <a:lstStyle/>
-                    <a:p>
-                      <a:pPr algn="ctr" indent="0" marL="0">
-                        <a:buNone/>
-                      </a:pPr>
-                      <a:r>
-                        <a:rPr lang="en-US" sz="900" dirty="0">
-                          <a:solidFill>
-                            <a:srgbClr val="000000"/>
-                          </a:solidFill>
-                          <a:latin typeface="Arial" pitchFamily="34" charset="0"/>
-                          <a:ea typeface="Arial" pitchFamily="34" charset="-122"/>
-                          <a:cs typeface="Arial" pitchFamily="34" charset="-120"/>
-                        </a:rPr>
-                        <a:t>8.75</a:t>
-                      </a:r>
-                      <a:endParaRPr lang="en-US" sz="900" dirty="0">
-                        <a:latin typeface="Arial" charset="0"/>
-                        <a:ea typeface="Arial" charset="0"/>
-                        <a:cs typeface="Arial" charset="0"/>
-                      </a:endParaRPr>
-                    </a:p>
-                  </a:txBody>
-                  <a:tcPr marL="91440" marR="91440" marT="45720" marB="45720">
-                    <a:lnL w="6350" cap="flat" cmpd="sng" algn="ctr">
-                      <a:solidFill>
-                        <a:srgbClr val="CBD5E1"/>
-                      </a:solidFill>
-                      <a:prstDash val="solid"/>
-                      <a:round/>
-                      <a:headEnd type="none" w="med" len="med"/>
-                      <a:tailEnd type="none" w="med" len="med"/>
-                    </a:lnL>
-                    <a:lnR w="6350" cap="flat" cmpd="sng" algn="ctr">
-                      <a:solidFill>
-                        <a:srgbClr val="CBD5E1"/>
-                      </a:solidFill>
-                      <a:prstDash val="solid"/>
-                      <a:round/>
-                      <a:headEnd type="none" w="med" len="med"/>
-                      <a:tailEnd type="none" w="med" len="med"/>
-                    </a:lnR>
-                    <a:lnT w="6350" cap="flat" cmpd="sng" algn="ctr">
-                      <a:solidFill>
-                        <a:srgbClr val="CBD5E1"/>
-                      </a:solidFill>
-                      <a:prstDash val="solid"/>
-                      <a:round/>
-                      <a:headEnd type="none" w="med" len="med"/>
-                      <a:tailEnd type="none" w="med" len="med"/>
-                    </a:lnT>
-                    <a:lnB w="6350" cap="flat" cmpd="sng" algn="ctr">
-                      <a:solidFill>
-                        <a:srgbClr val="CBD5E1"/>
-                      </a:solidFill>
-                      <a:prstDash val="solid"/>
-                      <a:round/>
-                      <a:headEnd type="none" w="med" len="med"/>
-                      <a:tailEnd type="none" w="med" len="med"/>
-                    </a:lnB>
-                    <a:solidFill>
-                      <a:srgbClr val="FFFFFF"/>
-                    </a:solidFill>
-                  </a:tcPr>
-                </a:tc>
-              </a:tr>
-              <a:tr h="201168">
-                <a:tc>
-                  <a:txBody>
-                    <a:bodyPr/>
-                    <a:lstStyle/>
-                    <a:p>
-                      <a:pPr algn="ctr" indent="0" marL="0">
-                        <a:buNone/>
-                      </a:pPr>
-                      <a:r>
-                        <a:rPr lang="en-US" sz="900" dirty="0">
-                          <a:solidFill>
-                            <a:srgbClr val="000000"/>
-                          </a:solidFill>
-                          <a:latin typeface="Arial" pitchFamily="34" charset="0"/>
-                          <a:ea typeface="Arial" pitchFamily="34" charset="-122"/>
-                          <a:cs typeface="Arial" pitchFamily="34" charset="-120"/>
-                        </a:rPr>
-                        <a:t>Trip.com</a:t>
-                      </a:r>
-                      <a:endParaRPr lang="en-US" sz="900" dirty="0">
-                        <a:latin typeface="Arial" charset="0"/>
-                        <a:ea typeface="Arial" charset="0"/>
-                        <a:cs typeface="Arial" charset="0"/>
-                      </a:endParaRPr>
-                    </a:p>
-                  </a:txBody>
-                  <a:tcPr marL="91440" marR="91440" marT="45720" marB="45720">
-                    <a:lnL w="6350" cap="flat" cmpd="sng" algn="ctr">
-                      <a:solidFill>
-                        <a:srgbClr val="CBD5E1"/>
-                      </a:solidFill>
-                      <a:prstDash val="solid"/>
-                      <a:round/>
-                      <a:headEnd type="none" w="med" len="med"/>
-                      <a:tailEnd type="none" w="med" len="med"/>
-                    </a:lnL>
-                    <a:lnR w="6350" cap="flat" cmpd="sng" algn="ctr">
-                      <a:solidFill>
-                        <a:srgbClr val="CBD5E1"/>
-                      </a:solidFill>
-                      <a:prstDash val="solid"/>
-                      <a:round/>
-                      <a:headEnd type="none" w="med" len="med"/>
-                      <a:tailEnd type="none" w="med" len="med"/>
-                    </a:lnR>
-                    <a:lnT w="6350" cap="flat" cmpd="sng" algn="ctr">
-                      <a:solidFill>
-                        <a:srgbClr val="CBD5E1"/>
-                      </a:solidFill>
-                      <a:prstDash val="solid"/>
-                      <a:round/>
-                      <a:headEnd type="none" w="med" len="med"/>
-                      <a:tailEnd type="none" w="med" len="med"/>
-                    </a:lnT>
-                    <a:lnB w="6350" cap="flat" cmpd="sng" algn="ctr">
-                      <a:solidFill>
-                        <a:srgbClr val="CBD5E1"/>
-                      </a:solidFill>
-                      <a:prstDash val="solid"/>
-                      <a:round/>
-                      <a:headEnd type="none" w="med" len="med"/>
-                      <a:tailEnd type="none" w="med" len="med"/>
-                    </a:lnB>
-                    <a:solidFill>
                       <a:srgbClr val="E8EFF8"/>
                     </a:solidFill>
                   </a:tcPr>
@@ -5820,211 +5990,7 @@
                           <a:ea typeface="Arial" pitchFamily="34" charset="-122"/>
                           <a:cs typeface="Arial" pitchFamily="34" charset="-120"/>
                         </a:rPr>
-                        <a:t>3</a:t>
-                      </a:r>
-                      <a:endParaRPr lang="en-US" sz="900" dirty="0">
-                        <a:latin typeface="Arial" charset="0"/>
-                        <a:ea typeface="Arial" charset="0"/>
-                        <a:cs typeface="Arial" charset="0"/>
-                      </a:endParaRPr>
-                    </a:p>
-                  </a:txBody>
-                  <a:tcPr marL="91440" marR="91440" marT="45720" marB="45720">
-                    <a:lnL w="6350" cap="flat" cmpd="sng" algn="ctr">
-                      <a:solidFill>
-                        <a:srgbClr val="CBD5E1"/>
-                      </a:solidFill>
-                      <a:prstDash val="solid"/>
-                      <a:round/>
-                      <a:headEnd type="none" w="med" len="med"/>
-                      <a:tailEnd type="none" w="med" len="med"/>
-                    </a:lnL>
-                    <a:lnR w="6350" cap="flat" cmpd="sng" algn="ctr">
-                      <a:solidFill>
-                        <a:srgbClr val="CBD5E1"/>
-                      </a:solidFill>
-                      <a:prstDash val="solid"/>
-                      <a:round/>
-                      <a:headEnd type="none" w="med" len="med"/>
-                      <a:tailEnd type="none" w="med" len="med"/>
-                    </a:lnR>
-                    <a:lnT w="6350" cap="flat" cmpd="sng" algn="ctr">
-                      <a:solidFill>
-                        <a:srgbClr val="CBD5E1"/>
-                      </a:solidFill>
-                      <a:prstDash val="solid"/>
-                      <a:round/>
-                      <a:headEnd type="none" w="med" len="med"/>
-                      <a:tailEnd type="none" w="med" len="med"/>
-                    </a:lnT>
-                    <a:lnB w="6350" cap="flat" cmpd="sng" algn="ctr">
-                      <a:solidFill>
-                        <a:srgbClr val="CBD5E1"/>
-                      </a:solidFill>
-                      <a:prstDash val="solid"/>
-                      <a:round/>
-                      <a:headEnd type="none" w="med" len="med"/>
-                      <a:tailEnd type="none" w="med" len="med"/>
-                    </a:lnB>
-                    <a:solidFill>
-                      <a:srgbClr val="E8EFF8"/>
-                    </a:solidFill>
-                  </a:tcPr>
-                </a:tc>
-                <a:tc>
-                  <a:txBody>
-                    <a:bodyPr/>
-                    <a:lstStyle/>
-                    <a:p>
-                      <a:pPr algn="ctr" indent="0" marL="0">
-                        <a:buNone/>
-                      </a:pPr>
-                      <a:r>
-                        <a:rPr lang="en-US" sz="900" dirty="0">
-                          <a:solidFill>
-                            <a:srgbClr val="000000"/>
-                          </a:solidFill>
-                          <a:latin typeface="Arial" pitchFamily="34" charset="0"/>
-                          <a:ea typeface="Arial" pitchFamily="34" charset="-122"/>
-                          <a:cs typeface="Arial" pitchFamily="34" charset="-120"/>
-                        </a:rPr>
-                        <a:t>8.67</a:t>
-                      </a:r>
-                      <a:endParaRPr lang="en-US" sz="900" dirty="0">
-                        <a:latin typeface="Arial" charset="0"/>
-                        <a:ea typeface="Arial" charset="0"/>
-                        <a:cs typeface="Arial" charset="0"/>
-                      </a:endParaRPr>
-                    </a:p>
-                  </a:txBody>
-                  <a:tcPr marL="91440" marR="91440" marT="45720" marB="45720">
-                    <a:lnL w="6350" cap="flat" cmpd="sng" algn="ctr">
-                      <a:solidFill>
-                        <a:srgbClr val="CBD5E1"/>
-                      </a:solidFill>
-                      <a:prstDash val="solid"/>
-                      <a:round/>
-                      <a:headEnd type="none" w="med" len="med"/>
-                      <a:tailEnd type="none" w="med" len="med"/>
-                    </a:lnL>
-                    <a:lnR w="6350" cap="flat" cmpd="sng" algn="ctr">
-                      <a:solidFill>
-                        <a:srgbClr val="CBD5E1"/>
-                      </a:solidFill>
-                      <a:prstDash val="solid"/>
-                      <a:round/>
-                      <a:headEnd type="none" w="med" len="med"/>
-                      <a:tailEnd type="none" w="med" len="med"/>
-                    </a:lnR>
-                    <a:lnT w="6350" cap="flat" cmpd="sng" algn="ctr">
-                      <a:solidFill>
-                        <a:srgbClr val="CBD5E1"/>
-                      </a:solidFill>
-                      <a:prstDash val="solid"/>
-                      <a:round/>
-                      <a:headEnd type="none" w="med" len="med"/>
-                      <a:tailEnd type="none" w="med" len="med"/>
-                    </a:lnT>
-                    <a:lnB w="6350" cap="flat" cmpd="sng" algn="ctr">
-                      <a:solidFill>
-                        <a:srgbClr val="CBD5E1"/>
-                      </a:solidFill>
-                      <a:prstDash val="solid"/>
-                      <a:round/>
-                      <a:headEnd type="none" w="med" len="med"/>
-                      <a:tailEnd type="none" w="med" len="med"/>
-                    </a:lnB>
-                    <a:solidFill>
-                      <a:srgbClr val="E8EFF8"/>
-                    </a:solidFill>
-                  </a:tcPr>
-                </a:tc>
-                <a:tc>
-                  <a:txBody>
-                    <a:bodyPr/>
-                    <a:lstStyle/>
-                    <a:p>
-                      <a:pPr algn="ctr" indent="0" marL="0">
-                        <a:buNone/>
-                      </a:pPr>
-                      <a:r>
-                        <a:rPr lang="en-US" sz="900" dirty="0">
-                          <a:solidFill>
-                            <a:srgbClr val="000000"/>
-                          </a:solidFill>
-                          <a:latin typeface="Arial" pitchFamily="34" charset="0"/>
-                          <a:ea typeface="Arial" pitchFamily="34" charset="-122"/>
-                          <a:cs typeface="Arial" pitchFamily="34" charset="-120"/>
-                        </a:rPr>
-                        <a:t>/10</a:t>
-                      </a:r>
-                      <a:endParaRPr lang="en-US" sz="900" dirty="0">
-                        <a:latin typeface="Arial" charset="0"/>
-                        <a:ea typeface="Arial" charset="0"/>
-                        <a:cs typeface="Arial" charset="0"/>
-                      </a:endParaRPr>
-                    </a:p>
-                  </a:txBody>
-                  <a:tcPr marL="91440" marR="91440" marT="45720" marB="45720">
-                    <a:lnL w="6350" cap="flat" cmpd="sng" algn="ctr">
-                      <a:solidFill>
-                        <a:srgbClr val="CBD5E1"/>
-                      </a:solidFill>
-                      <a:prstDash val="solid"/>
-                      <a:round/>
-                      <a:headEnd type="none" w="med" len="med"/>
-                      <a:tailEnd type="none" w="med" len="med"/>
-                    </a:lnL>
-                    <a:lnR w="6350" cap="flat" cmpd="sng" algn="ctr">
-                      <a:solidFill>
-                        <a:srgbClr val="CBD5E1"/>
-                      </a:solidFill>
-                      <a:prstDash val="solid"/>
-                      <a:round/>
-                      <a:headEnd type="none" w="med" len="med"/>
-                      <a:tailEnd type="none" w="med" len="med"/>
-                    </a:lnR>
-                    <a:lnT w="6350" cap="flat" cmpd="sng" algn="ctr">
-                      <a:solidFill>
-                        <a:srgbClr val="CBD5E1"/>
-                      </a:solidFill>
-                      <a:prstDash val="solid"/>
-                      <a:round/>
-                      <a:headEnd type="none" w="med" len="med"/>
-                      <a:tailEnd type="none" w="med" len="med"/>
-                    </a:lnT>
-                    <a:lnB w="6350" cap="flat" cmpd="sng" algn="ctr">
-                      <a:solidFill>
-                        <a:srgbClr val="CBD5E1"/>
-                      </a:solidFill>
-                      <a:prstDash val="solid"/>
-                      <a:round/>
-                      <a:headEnd type="none" w="med" len="med"/>
-                      <a:tailEnd type="none" w="med" len="med"/>
-                    </a:lnB>
-                    <a:solidFill>
-                      <a:srgbClr val="E8EFF8"/>
-                    </a:solidFill>
-                  </a:tcPr>
-                </a:tc>
-                <a:tc>
-                  <a:txBody>
-                    <a:bodyPr/>
-                    <a:lstStyle/>
-                    <a:p>
-                      <a:pPr algn="ctr" indent="0" marL="0">
-                        <a:buNone/>
-                      </a:pPr>
-                      <a:r>
-                        <a:rPr lang="en-US" sz="900" dirty="0">
-                          <a:solidFill>
-                            <a:srgbClr val="000000"/>
-                          </a:solidFill>
-                          <a:latin typeface="Arial" pitchFamily="34" charset="0"/>
-                          <a:ea typeface="Arial" pitchFamily="34" charset="-122"/>
-                          <a:cs typeface="Arial" pitchFamily="34" charset="-120"/>
-                        </a:rPr>
-                        <a:t>8.67</a:t>
+                        <a:t>8.00</a:t>
                       </a:r>
                       <a:endParaRPr lang="en-US" sz="900" dirty="0">
                         <a:latin typeface="Arial" charset="0"/>
@@ -6162,7 +6128,7 @@
                           <a:ea typeface="Arial" pitchFamily="34" charset="-122"/>
                           <a:cs typeface="Arial" pitchFamily="34" charset="-120"/>
                         </a:rPr>
-                        <a:t>22</a:t>
+                        <a:t>9</a:t>
                       </a:r>
                       <a:endParaRPr lang="en-US" sz="900" dirty="0">
                         <a:latin typeface="Arial" charset="0"/>
@@ -6230,7 +6196,7 @@
                           <a:ea typeface="Arial" pitchFamily="34" charset="-122"/>
                           <a:cs typeface="Arial" pitchFamily="34" charset="-120"/>
                         </a:rPr>
-                        <a:t>8.00</a:t>
+                        <a:t>7.89</a:t>
                       </a:r>
                       <a:endParaRPr lang="en-US" sz="900" dirty="0">
                         <a:latin typeface="Arial" charset="0"/>
@@ -6366,7 +6332,7 @@
                           <a:ea typeface="Arial" pitchFamily="34" charset="-122"/>
                           <a:cs typeface="Arial" pitchFamily="34" charset="-120"/>
                         </a:rPr>
-                        <a:t>8.00</a:t>
+                        <a:t>7.89</a:t>
                       </a:r>
                       <a:endParaRPr lang="en-US" sz="900" dirty="0">
                         <a:latin typeface="Arial" charset="0"/>
@@ -6414,348 +6380,6 @@
                     </a:lnB>
                     <a:solidFill>
                       <a:srgbClr val="FFFFFF"/>
-                    </a:solidFill>
-                  </a:tcPr>
-                </a:tc>
-              </a:tr>
-              <a:tr h="201168">
-                <a:tc>
-                  <a:txBody>
-                    <a:bodyPr/>
-                    <a:lstStyle/>
-                    <a:p>
-                      <a:pPr algn="ctr" indent="0" marL="0">
-                        <a:buNone/>
-                      </a:pPr>
-                      <a:r>
-                        <a:rPr lang="en-US" sz="900" dirty="0">
-                          <a:solidFill>
-                            <a:srgbClr val="000000"/>
-                          </a:solidFill>
-                          <a:latin typeface="Arial" pitchFamily="34" charset="0"/>
-                          <a:ea typeface="Arial" pitchFamily="34" charset="-122"/>
-                          <a:cs typeface="Arial" pitchFamily="34" charset="-120"/>
-                        </a:rPr>
-                        <a:t>Agoda</a:t>
-                      </a:r>
-                      <a:endParaRPr lang="en-US" sz="900" dirty="0">
-                        <a:latin typeface="Arial" charset="0"/>
-                        <a:ea typeface="Arial" charset="0"/>
-                        <a:cs typeface="Arial" charset="0"/>
-                      </a:endParaRPr>
-                    </a:p>
-                  </a:txBody>
-                  <a:tcPr marL="91440" marR="91440" marT="45720" marB="45720">
-                    <a:lnL w="6350" cap="flat" cmpd="sng" algn="ctr">
-                      <a:solidFill>
-                        <a:srgbClr val="CBD5E1"/>
-                      </a:solidFill>
-                      <a:prstDash val="solid"/>
-                      <a:round/>
-                      <a:headEnd type="none" w="med" len="med"/>
-                      <a:tailEnd type="none" w="med" len="med"/>
-                    </a:lnL>
-                    <a:lnR w="6350" cap="flat" cmpd="sng" algn="ctr">
-                      <a:solidFill>
-                        <a:srgbClr val="CBD5E1"/>
-                      </a:solidFill>
-                      <a:prstDash val="solid"/>
-                      <a:round/>
-                      <a:headEnd type="none" w="med" len="med"/>
-                      <a:tailEnd type="none" w="med" len="med"/>
-                    </a:lnR>
-                    <a:lnT w="6350" cap="flat" cmpd="sng" algn="ctr">
-                      <a:solidFill>
-                        <a:srgbClr val="CBD5E1"/>
-                      </a:solidFill>
-                      <a:prstDash val="solid"/>
-                      <a:round/>
-                      <a:headEnd type="none" w="med" len="med"/>
-                      <a:tailEnd type="none" w="med" len="med"/>
-                    </a:lnT>
-                    <a:lnB w="6350" cap="flat" cmpd="sng" algn="ctr">
-                      <a:solidFill>
-                        <a:srgbClr val="CBD5E1"/>
-                      </a:solidFill>
-                      <a:prstDash val="solid"/>
-                      <a:round/>
-                      <a:headEnd type="none" w="med" len="med"/>
-                      <a:tailEnd type="none" w="med" len="med"/>
-                    </a:lnB>
-                    <a:solidFill>
-                      <a:srgbClr val="E8EFF8"/>
-                    </a:solidFill>
-                  </a:tcPr>
-                </a:tc>
-                <a:tc>
-                  <a:txBody>
-                    <a:bodyPr/>
-                    <a:lstStyle/>
-                    <a:p>
-                      <a:pPr algn="ctr" indent="0" marL="0">
-                        <a:buNone/>
-                      </a:pPr>
-                      <a:r>
-                        <a:rPr lang="en-US" sz="900" dirty="0">
-                          <a:solidFill>
-                            <a:srgbClr val="000000"/>
-                          </a:solidFill>
-                          <a:latin typeface="Arial" pitchFamily="34" charset="0"/>
-                          <a:ea typeface="Arial" pitchFamily="34" charset="-122"/>
-                          <a:cs typeface="Arial" pitchFamily="34" charset="-120"/>
-                        </a:rPr>
-                        <a:t>8</a:t>
-                      </a:r>
-                      <a:endParaRPr lang="en-US" sz="900" dirty="0">
-                        <a:latin typeface="Arial" charset="0"/>
-                        <a:ea typeface="Arial" charset="0"/>
-                        <a:cs typeface="Arial" charset="0"/>
-                      </a:endParaRPr>
-                    </a:p>
-                  </a:txBody>
-                  <a:tcPr marL="91440" marR="91440" marT="45720" marB="45720">
-                    <a:lnL w="6350" cap="flat" cmpd="sng" algn="ctr">
-                      <a:solidFill>
-                        <a:srgbClr val="CBD5E1"/>
-                      </a:solidFill>
-                      <a:prstDash val="solid"/>
-                      <a:round/>
-                      <a:headEnd type="none" w="med" len="med"/>
-                      <a:tailEnd type="none" w="med" len="med"/>
-                    </a:lnL>
-                    <a:lnR w="6350" cap="flat" cmpd="sng" algn="ctr">
-                      <a:solidFill>
-                        <a:srgbClr val="CBD5E1"/>
-                      </a:solidFill>
-                      <a:prstDash val="solid"/>
-                      <a:round/>
-                      <a:headEnd type="none" w="med" len="med"/>
-                      <a:tailEnd type="none" w="med" len="med"/>
-                    </a:lnR>
-                    <a:lnT w="6350" cap="flat" cmpd="sng" algn="ctr">
-                      <a:solidFill>
-                        <a:srgbClr val="CBD5E1"/>
-                      </a:solidFill>
-                      <a:prstDash val="solid"/>
-                      <a:round/>
-                      <a:headEnd type="none" w="med" len="med"/>
-                      <a:tailEnd type="none" w="med" len="med"/>
-                    </a:lnT>
-                    <a:lnB w="6350" cap="flat" cmpd="sng" algn="ctr">
-                      <a:solidFill>
-                        <a:srgbClr val="CBD5E1"/>
-                      </a:solidFill>
-                      <a:prstDash val="solid"/>
-                      <a:round/>
-                      <a:headEnd type="none" w="med" len="med"/>
-                      <a:tailEnd type="none" w="med" len="med"/>
-                    </a:lnB>
-                    <a:solidFill>
-                      <a:srgbClr val="E8EFF8"/>
-                    </a:solidFill>
-                  </a:tcPr>
-                </a:tc>
-                <a:tc>
-                  <a:txBody>
-                    <a:bodyPr/>
-                    <a:lstStyle/>
-                    <a:p>
-                      <a:pPr algn="ctr" indent="0" marL="0">
-                        <a:buNone/>
-                      </a:pPr>
-                      <a:r>
-                        <a:rPr lang="en-US" sz="900" dirty="0">
-                          <a:solidFill>
-                            <a:srgbClr val="000000"/>
-                          </a:solidFill>
-                          <a:latin typeface="Arial" pitchFamily="34" charset="0"/>
-                          <a:ea typeface="Arial" pitchFamily="34" charset="-122"/>
-                          <a:cs typeface="Arial" pitchFamily="34" charset="-120"/>
-                        </a:rPr>
-                        <a:t>7.88</a:t>
-                      </a:r>
-                      <a:endParaRPr lang="en-US" sz="900" dirty="0">
-                        <a:latin typeface="Arial" charset="0"/>
-                        <a:ea typeface="Arial" charset="0"/>
-                        <a:cs typeface="Arial" charset="0"/>
-                      </a:endParaRPr>
-                    </a:p>
-                  </a:txBody>
-                  <a:tcPr marL="91440" marR="91440" marT="45720" marB="45720">
-                    <a:lnL w="6350" cap="flat" cmpd="sng" algn="ctr">
-                      <a:solidFill>
-                        <a:srgbClr val="CBD5E1"/>
-                      </a:solidFill>
-                      <a:prstDash val="solid"/>
-                      <a:round/>
-                      <a:headEnd type="none" w="med" len="med"/>
-                      <a:tailEnd type="none" w="med" len="med"/>
-                    </a:lnL>
-                    <a:lnR w="6350" cap="flat" cmpd="sng" algn="ctr">
-                      <a:solidFill>
-                        <a:srgbClr val="CBD5E1"/>
-                      </a:solidFill>
-                      <a:prstDash val="solid"/>
-                      <a:round/>
-                      <a:headEnd type="none" w="med" len="med"/>
-                      <a:tailEnd type="none" w="med" len="med"/>
-                    </a:lnR>
-                    <a:lnT w="6350" cap="flat" cmpd="sng" algn="ctr">
-                      <a:solidFill>
-                        <a:srgbClr val="CBD5E1"/>
-                      </a:solidFill>
-                      <a:prstDash val="solid"/>
-                      <a:round/>
-                      <a:headEnd type="none" w="med" len="med"/>
-                      <a:tailEnd type="none" w="med" len="med"/>
-                    </a:lnT>
-                    <a:lnB w="6350" cap="flat" cmpd="sng" algn="ctr">
-                      <a:solidFill>
-                        <a:srgbClr val="CBD5E1"/>
-                      </a:solidFill>
-                      <a:prstDash val="solid"/>
-                      <a:round/>
-                      <a:headEnd type="none" w="med" len="med"/>
-                      <a:tailEnd type="none" w="med" len="med"/>
-                    </a:lnB>
-                    <a:solidFill>
-                      <a:srgbClr val="E8EFF8"/>
-                    </a:solidFill>
-                  </a:tcPr>
-                </a:tc>
-                <a:tc>
-                  <a:txBody>
-                    <a:bodyPr/>
-                    <a:lstStyle/>
-                    <a:p>
-                      <a:pPr algn="ctr" indent="0" marL="0">
-                        <a:buNone/>
-                      </a:pPr>
-                      <a:r>
-                        <a:rPr lang="en-US" sz="900" dirty="0">
-                          <a:solidFill>
-                            <a:srgbClr val="000000"/>
-                          </a:solidFill>
-                          <a:latin typeface="Arial" pitchFamily="34" charset="0"/>
-                          <a:ea typeface="Arial" pitchFamily="34" charset="-122"/>
-                          <a:cs typeface="Arial" pitchFamily="34" charset="-120"/>
-                        </a:rPr>
-                        <a:t>/10</a:t>
-                      </a:r>
-                      <a:endParaRPr lang="en-US" sz="900" dirty="0">
-                        <a:latin typeface="Arial" charset="0"/>
-                        <a:ea typeface="Arial" charset="0"/>
-                        <a:cs typeface="Arial" charset="0"/>
-                      </a:endParaRPr>
-                    </a:p>
-                  </a:txBody>
-                  <a:tcPr marL="91440" marR="91440" marT="45720" marB="45720">
-                    <a:lnL w="6350" cap="flat" cmpd="sng" algn="ctr">
-                      <a:solidFill>
-                        <a:srgbClr val="CBD5E1"/>
-                      </a:solidFill>
-                      <a:prstDash val="solid"/>
-                      <a:round/>
-                      <a:headEnd type="none" w="med" len="med"/>
-                      <a:tailEnd type="none" w="med" len="med"/>
-                    </a:lnL>
-                    <a:lnR w="6350" cap="flat" cmpd="sng" algn="ctr">
-                      <a:solidFill>
-                        <a:srgbClr val="CBD5E1"/>
-                      </a:solidFill>
-                      <a:prstDash val="solid"/>
-                      <a:round/>
-                      <a:headEnd type="none" w="med" len="med"/>
-                      <a:tailEnd type="none" w="med" len="med"/>
-                    </a:lnR>
-                    <a:lnT w="6350" cap="flat" cmpd="sng" algn="ctr">
-                      <a:solidFill>
-                        <a:srgbClr val="CBD5E1"/>
-                      </a:solidFill>
-                      <a:prstDash val="solid"/>
-                      <a:round/>
-                      <a:headEnd type="none" w="med" len="med"/>
-                      <a:tailEnd type="none" w="med" len="med"/>
-                    </a:lnT>
-                    <a:lnB w="6350" cap="flat" cmpd="sng" algn="ctr">
-                      <a:solidFill>
-                        <a:srgbClr val="CBD5E1"/>
-                      </a:solidFill>
-                      <a:prstDash val="solid"/>
-                      <a:round/>
-                      <a:headEnd type="none" w="med" len="med"/>
-                      <a:tailEnd type="none" w="med" len="med"/>
-                    </a:lnB>
-                    <a:solidFill>
-                      <a:srgbClr val="E8EFF8"/>
-                    </a:solidFill>
-                  </a:tcPr>
-                </a:tc>
-                <a:tc>
-                  <a:txBody>
-                    <a:bodyPr/>
-                    <a:lstStyle/>
-                    <a:p>
-                      <a:pPr algn="ctr" indent="0" marL="0">
-                        <a:buNone/>
-                      </a:pPr>
-                      <a:r>
-                        <a:rPr lang="en-US" sz="900" dirty="0">
-                          <a:solidFill>
-                            <a:srgbClr val="000000"/>
-                          </a:solidFill>
-                          <a:latin typeface="Arial" pitchFamily="34" charset="0"/>
-                          <a:ea typeface="Arial" pitchFamily="34" charset="-122"/>
-                          <a:cs typeface="Arial" pitchFamily="34" charset="-120"/>
-                        </a:rPr>
-                        <a:t>7.88</a:t>
-                      </a:r>
-                      <a:endParaRPr lang="en-US" sz="900" dirty="0">
-                        <a:latin typeface="Arial" charset="0"/>
-                        <a:ea typeface="Arial" charset="0"/>
-                        <a:cs typeface="Arial" charset="0"/>
-                      </a:endParaRPr>
-                    </a:p>
-                  </a:txBody>
-                  <a:tcPr marL="91440" marR="91440" marT="45720" marB="45720">
-                    <a:lnL w="6350" cap="flat" cmpd="sng" algn="ctr">
-                      <a:solidFill>
-                        <a:srgbClr val="CBD5E1"/>
-                      </a:solidFill>
-                      <a:prstDash val="solid"/>
-                      <a:round/>
-                      <a:headEnd type="none" w="med" len="med"/>
-                      <a:tailEnd type="none" w="med" len="med"/>
-                    </a:lnL>
-                    <a:lnR w="6350" cap="flat" cmpd="sng" algn="ctr">
-                      <a:solidFill>
-                        <a:srgbClr val="CBD5E1"/>
-                      </a:solidFill>
-                      <a:prstDash val="solid"/>
-                      <a:round/>
-                      <a:headEnd type="none" w="med" len="med"/>
-                      <a:tailEnd type="none" w="med" len="med"/>
-                    </a:lnR>
-                    <a:lnT w="6350" cap="flat" cmpd="sng" algn="ctr">
-                      <a:solidFill>
-                        <a:srgbClr val="CBD5E1"/>
-                      </a:solidFill>
-                      <a:prstDash val="solid"/>
-                      <a:round/>
-                      <a:headEnd type="none" w="med" len="med"/>
-                      <a:tailEnd type="none" w="med" len="med"/>
-                    </a:lnT>
-                    <a:lnB w="6350" cap="flat" cmpd="sng" algn="ctr">
-                      <a:solidFill>
-                        <a:srgbClr val="CBD5E1"/>
-                      </a:solidFill>
-                      <a:prstDash val="solid"/>
-                      <a:round/>
-                      <a:headEnd type="none" w="med" len="med"/>
-                      <a:tailEnd type="none" w="med" len="med"/>
-                    </a:lnB>
-                    <a:solidFill>
-                      <a:srgbClr val="E8EFF8"/>
                     </a:solidFill>
                   </a:tcPr>
                 </a:tc>
@@ -6825,7 +6449,7 @@
                       <a:tailEnd type="none" w="med" len="med"/>
                     </a:lnB>
                     <a:solidFill>
-                      <a:srgbClr val="FFFFFF"/>
+                      <a:srgbClr val="E8EFF8"/>
                     </a:solidFill>
                   </a:tcPr>
                 </a:tc>
@@ -6846,7 +6470,7 @@
                           <a:ea typeface="Arial" pitchFamily="34" charset="-122"/>
                           <a:cs typeface="Arial" pitchFamily="34" charset="-120"/>
                         </a:rPr>
-                        <a:t>16</a:t>
+                        <a:t>6</a:t>
                       </a:r>
                       <a:endParaRPr lang="en-US" sz="900" dirty="0">
                         <a:latin typeface="Arial" charset="0"/>
@@ -6893,7 +6517,7 @@
                       <a:tailEnd type="none" w="med" len="med"/>
                     </a:lnB>
                     <a:solidFill>
-                      <a:srgbClr val="FFFFFF"/>
+                      <a:srgbClr val="E8EFF8"/>
                     </a:solidFill>
                   </a:tcPr>
                 </a:tc>
@@ -6914,7 +6538,7 @@
                           <a:ea typeface="Arial" pitchFamily="34" charset="-122"/>
                           <a:cs typeface="Arial" pitchFamily="34" charset="-120"/>
                         </a:rPr>
-                        <a:t>3.94</a:t>
+                        <a:t>3.83</a:t>
                       </a:r>
                       <a:endParaRPr lang="en-US" sz="900" dirty="0">
                         <a:latin typeface="Arial" charset="0"/>
@@ -6961,7 +6585,7 @@
                       <a:tailEnd type="none" w="med" len="med"/>
                     </a:lnB>
                     <a:solidFill>
-                      <a:srgbClr val="FFFFFF"/>
+                      <a:srgbClr val="E8EFF8"/>
                     </a:solidFill>
                   </a:tcPr>
                 </a:tc>
@@ -7029,6 +6653,144 @@
                       <a:tailEnd type="none" w="med" len="med"/>
                     </a:lnB>
                     <a:solidFill>
+                      <a:srgbClr val="E8EFF8"/>
+                    </a:solidFill>
+                  </a:tcPr>
+                </a:tc>
+                <a:tc>
+                  <a:txBody>
+                    <a:bodyPr/>
+                    <a:lstStyle/>
+                    <a:p>
+                      <a:pPr algn="ctr" indent="0" marL="0">
+                        <a:buNone/>
+                      </a:pPr>
+                      <a:r>
+                        <a:rPr lang="en-US" sz="900" dirty="0">
+                          <a:solidFill>
+                            <a:srgbClr val="000000"/>
+                          </a:solidFill>
+                          <a:latin typeface="Arial" pitchFamily="34" charset="0"/>
+                          <a:ea typeface="Arial" pitchFamily="34" charset="-122"/>
+                          <a:cs typeface="Arial" pitchFamily="34" charset="-120"/>
+                        </a:rPr>
+                        <a:t>7.67</a:t>
+                      </a:r>
+                      <a:endParaRPr lang="en-US" sz="900" dirty="0">
+                        <a:latin typeface="Arial" charset="0"/>
+                        <a:ea typeface="Arial" charset="0"/>
+                        <a:cs typeface="Arial" charset="0"/>
+                      </a:endParaRPr>
+                    </a:p>
+                  </a:txBody>
+                  <a:tcPr marL="91440" marR="91440" marT="45720" marB="45720">
+                    <a:lnL w="6350" cap="flat" cmpd="sng" algn="ctr">
+                      <a:solidFill>
+                        <a:srgbClr val="CBD5E1"/>
+                      </a:solidFill>
+                      <a:prstDash val="solid"/>
+                      <a:round/>
+                      <a:headEnd type="none" w="med" len="med"/>
+                      <a:tailEnd type="none" w="med" len="med"/>
+                    </a:lnL>
+                    <a:lnR w="6350" cap="flat" cmpd="sng" algn="ctr">
+                      <a:solidFill>
+                        <a:srgbClr val="CBD5E1"/>
+                      </a:solidFill>
+                      <a:prstDash val="solid"/>
+                      <a:round/>
+                      <a:headEnd type="none" w="med" len="med"/>
+                      <a:tailEnd type="none" w="med" len="med"/>
+                    </a:lnR>
+                    <a:lnT w="6350" cap="flat" cmpd="sng" algn="ctr">
+                      <a:solidFill>
+                        <a:srgbClr val="CBD5E1"/>
+                      </a:solidFill>
+                      <a:prstDash val="solid"/>
+                      <a:round/>
+                      <a:headEnd type="none" w="med" len="med"/>
+                      <a:tailEnd type="none" w="med" len="med"/>
+                    </a:lnT>
+                    <a:lnB w="6350" cap="flat" cmpd="sng" algn="ctr">
+                      <a:solidFill>
+                        <a:srgbClr val="CBD5E1"/>
+                      </a:solidFill>
+                      <a:prstDash val="solid"/>
+                      <a:round/>
+                      <a:headEnd type="none" w="med" len="med"/>
+                      <a:tailEnd type="none" w="med" len="med"/>
+                    </a:lnB>
+                    <a:solidFill>
+                      <a:srgbClr val="E8EFF8"/>
+                    </a:solidFill>
+                  </a:tcPr>
+                </a:tc>
+              </a:tr>
+              <a:tr h="201168">
+                <a:tc>
+                  <a:txBody>
+                    <a:bodyPr/>
+                    <a:lstStyle/>
+                    <a:p>
+                      <a:pPr algn="ctr" indent="0" marL="0">
+                        <a:buNone/>
+                      </a:pPr>
+                      <a:r>
+                        <a:rPr lang="en-US" sz="900" dirty="0">
+                          <a:solidFill>
+                            <a:srgbClr val="000000"/>
+                          </a:solidFill>
+                          <a:latin typeface="Arial" pitchFamily="34" charset="0"/>
+                          <a:ea typeface="Arial" pitchFamily="34" charset="-122"/>
+                          <a:cs typeface="Arial" pitchFamily="34" charset="-120"/>
+                        </a:rPr>
+                        <a:t>Trip.com</a:t>
+                      </a:r>
+                      <a:endParaRPr lang="en-US" sz="900" dirty="0">
+                        <a:latin typeface="Arial" charset="0"/>
+                        <a:ea typeface="Arial" charset="0"/>
+                        <a:cs typeface="Arial" charset="0"/>
+                      </a:endParaRPr>
+                    </a:p>
+                  </a:txBody>
+                  <a:tcPr marL="91440" marR="91440" marT="45720" marB="45720">
+                    <a:lnL w="6350" cap="flat" cmpd="sng" algn="ctr">
+                      <a:solidFill>
+                        <a:srgbClr val="CBD5E1"/>
+                      </a:solidFill>
+                      <a:prstDash val="solid"/>
+                      <a:round/>
+                      <a:headEnd type="none" w="med" len="med"/>
+                      <a:tailEnd type="none" w="med" len="med"/>
+                    </a:lnL>
+                    <a:lnR w="6350" cap="flat" cmpd="sng" algn="ctr">
+                      <a:solidFill>
+                        <a:srgbClr val="CBD5E1"/>
+                      </a:solidFill>
+                      <a:prstDash val="solid"/>
+                      <a:round/>
+                      <a:headEnd type="none" w="med" len="med"/>
+                      <a:tailEnd type="none" w="med" len="med"/>
+                    </a:lnR>
+                    <a:lnT w="6350" cap="flat" cmpd="sng" algn="ctr">
+                      <a:solidFill>
+                        <a:srgbClr val="CBD5E1"/>
+                      </a:solidFill>
+                      <a:prstDash val="solid"/>
+                      <a:round/>
+                      <a:headEnd type="none" w="med" len="med"/>
+                      <a:tailEnd type="none" w="med" len="med"/>
+                    </a:lnT>
+                    <a:lnB w="6350" cap="flat" cmpd="sng" algn="ctr">
+                      <a:solidFill>
+                        <a:srgbClr val="CBD5E1"/>
+                      </a:solidFill>
+                      <a:prstDash val="solid"/>
+                      <a:round/>
+                      <a:headEnd type="none" w="med" len="med"/>
+                      <a:tailEnd type="none" w="med" len="med"/>
+                    </a:lnB>
+                    <a:solidFill>
                       <a:srgbClr val="FFFFFF"/>
                     </a:solidFill>
                   </a:tcPr>
@@ -7050,7 +6812,211 @@
                           <a:ea typeface="Arial" pitchFamily="34" charset="-122"/>
                           <a:cs typeface="Arial" pitchFamily="34" charset="-120"/>
                         </a:rPr>
-                        <a:t>7.88</a:t>
+                        <a:t>1</a:t>
+                      </a:r>
+                      <a:endParaRPr lang="en-US" sz="900" dirty="0">
+                        <a:latin typeface="Arial" charset="0"/>
+                        <a:ea typeface="Arial" charset="0"/>
+                        <a:cs typeface="Arial" charset="0"/>
+                      </a:endParaRPr>
+                    </a:p>
+                  </a:txBody>
+                  <a:tcPr marL="91440" marR="91440" marT="45720" marB="45720">
+                    <a:lnL w="6350" cap="flat" cmpd="sng" algn="ctr">
+                      <a:solidFill>
+                        <a:srgbClr val="CBD5E1"/>
+                      </a:solidFill>
+                      <a:prstDash val="solid"/>
+                      <a:round/>
+                      <a:headEnd type="none" w="med" len="med"/>
+                      <a:tailEnd type="none" w="med" len="med"/>
+                    </a:lnL>
+                    <a:lnR w="6350" cap="flat" cmpd="sng" algn="ctr">
+                      <a:solidFill>
+                        <a:srgbClr val="CBD5E1"/>
+                      </a:solidFill>
+                      <a:prstDash val="solid"/>
+                      <a:round/>
+                      <a:headEnd type="none" w="med" len="med"/>
+                      <a:tailEnd type="none" w="med" len="med"/>
+                    </a:lnR>
+                    <a:lnT w="6350" cap="flat" cmpd="sng" algn="ctr">
+                      <a:solidFill>
+                        <a:srgbClr val="CBD5E1"/>
+                      </a:solidFill>
+                      <a:prstDash val="solid"/>
+                      <a:round/>
+                      <a:headEnd type="none" w="med" len="med"/>
+                      <a:tailEnd type="none" w="med" len="med"/>
+                    </a:lnT>
+                    <a:lnB w="6350" cap="flat" cmpd="sng" algn="ctr">
+                      <a:solidFill>
+                        <a:srgbClr val="CBD5E1"/>
+                      </a:solidFill>
+                      <a:prstDash val="solid"/>
+                      <a:round/>
+                      <a:headEnd type="none" w="med" len="med"/>
+                      <a:tailEnd type="none" w="med" len="med"/>
+                    </a:lnB>
+                    <a:solidFill>
+                      <a:srgbClr val="FFFFFF"/>
+                    </a:solidFill>
+                  </a:tcPr>
+                </a:tc>
+                <a:tc>
+                  <a:txBody>
+                    <a:bodyPr/>
+                    <a:lstStyle/>
+                    <a:p>
+                      <a:pPr algn="ctr" indent="0" marL="0">
+                        <a:buNone/>
+                      </a:pPr>
+                      <a:r>
+                        <a:rPr lang="en-US" sz="900" dirty="0">
+                          <a:solidFill>
+                            <a:srgbClr val="000000"/>
+                          </a:solidFill>
+                          <a:latin typeface="Arial" pitchFamily="34" charset="0"/>
+                          <a:ea typeface="Arial" pitchFamily="34" charset="-122"/>
+                          <a:cs typeface="Arial" pitchFamily="34" charset="-120"/>
+                        </a:rPr>
+                        <a:t>6.00</a:t>
+                      </a:r>
+                      <a:endParaRPr lang="en-US" sz="900" dirty="0">
+                        <a:latin typeface="Arial" charset="0"/>
+                        <a:ea typeface="Arial" charset="0"/>
+                        <a:cs typeface="Arial" charset="0"/>
+                      </a:endParaRPr>
+                    </a:p>
+                  </a:txBody>
+                  <a:tcPr marL="91440" marR="91440" marT="45720" marB="45720">
+                    <a:lnL w="6350" cap="flat" cmpd="sng" algn="ctr">
+                      <a:solidFill>
+                        <a:srgbClr val="CBD5E1"/>
+                      </a:solidFill>
+                      <a:prstDash val="solid"/>
+                      <a:round/>
+                      <a:headEnd type="none" w="med" len="med"/>
+                      <a:tailEnd type="none" w="med" len="med"/>
+                    </a:lnL>
+                    <a:lnR w="6350" cap="flat" cmpd="sng" algn="ctr">
+                      <a:solidFill>
+                        <a:srgbClr val="CBD5E1"/>
+                      </a:solidFill>
+                      <a:prstDash val="solid"/>
+                      <a:round/>
+                      <a:headEnd type="none" w="med" len="med"/>
+                      <a:tailEnd type="none" w="med" len="med"/>
+                    </a:lnR>
+                    <a:lnT w="6350" cap="flat" cmpd="sng" algn="ctr">
+                      <a:solidFill>
+                        <a:srgbClr val="CBD5E1"/>
+                      </a:solidFill>
+                      <a:prstDash val="solid"/>
+                      <a:round/>
+                      <a:headEnd type="none" w="med" len="med"/>
+                      <a:tailEnd type="none" w="med" len="med"/>
+                    </a:lnT>
+                    <a:lnB w="6350" cap="flat" cmpd="sng" algn="ctr">
+                      <a:solidFill>
+                        <a:srgbClr val="CBD5E1"/>
+                      </a:solidFill>
+                      <a:prstDash val="solid"/>
+                      <a:round/>
+                      <a:headEnd type="none" w="med" len="med"/>
+                      <a:tailEnd type="none" w="med" len="med"/>
+                    </a:lnB>
+                    <a:solidFill>
+                      <a:srgbClr val="FFFFFF"/>
+                    </a:solidFill>
+                  </a:tcPr>
+                </a:tc>
+                <a:tc>
+                  <a:txBody>
+                    <a:bodyPr/>
+                    <a:lstStyle/>
+                    <a:p>
+                      <a:pPr algn="ctr" indent="0" marL="0">
+                        <a:buNone/>
+                      </a:pPr>
+                      <a:r>
+                        <a:rPr lang="en-US" sz="900" dirty="0">
+                          <a:solidFill>
+                            <a:srgbClr val="000000"/>
+                          </a:solidFill>
+                          <a:latin typeface="Arial" pitchFamily="34" charset="0"/>
+                          <a:ea typeface="Arial" pitchFamily="34" charset="-122"/>
+                          <a:cs typeface="Arial" pitchFamily="34" charset="-120"/>
+                        </a:rPr>
+                        <a:t>/10</a:t>
+                      </a:r>
+                      <a:endParaRPr lang="en-US" sz="900" dirty="0">
+                        <a:latin typeface="Arial" charset="0"/>
+                        <a:ea typeface="Arial" charset="0"/>
+                        <a:cs typeface="Arial" charset="0"/>
+                      </a:endParaRPr>
+                    </a:p>
+                  </a:txBody>
+                  <a:tcPr marL="91440" marR="91440" marT="45720" marB="45720">
+                    <a:lnL w="6350" cap="flat" cmpd="sng" algn="ctr">
+                      <a:solidFill>
+                        <a:srgbClr val="CBD5E1"/>
+                      </a:solidFill>
+                      <a:prstDash val="solid"/>
+                      <a:round/>
+                      <a:headEnd type="none" w="med" len="med"/>
+                      <a:tailEnd type="none" w="med" len="med"/>
+                    </a:lnL>
+                    <a:lnR w="6350" cap="flat" cmpd="sng" algn="ctr">
+                      <a:solidFill>
+                        <a:srgbClr val="CBD5E1"/>
+                      </a:solidFill>
+                      <a:prstDash val="solid"/>
+                      <a:round/>
+                      <a:headEnd type="none" w="med" len="med"/>
+                      <a:tailEnd type="none" w="med" len="med"/>
+                    </a:lnR>
+                    <a:lnT w="6350" cap="flat" cmpd="sng" algn="ctr">
+                      <a:solidFill>
+                        <a:srgbClr val="CBD5E1"/>
+                      </a:solidFill>
+                      <a:prstDash val="solid"/>
+                      <a:round/>
+                      <a:headEnd type="none" w="med" len="med"/>
+                      <a:tailEnd type="none" w="med" len="med"/>
+                    </a:lnT>
+                    <a:lnB w="6350" cap="flat" cmpd="sng" algn="ctr">
+                      <a:solidFill>
+                        <a:srgbClr val="CBD5E1"/>
+                      </a:solidFill>
+                      <a:prstDash val="solid"/>
+                      <a:round/>
+                      <a:headEnd type="none" w="med" len="med"/>
+                      <a:tailEnd type="none" w="med" len="med"/>
+                    </a:lnB>
+                    <a:solidFill>
+                      <a:srgbClr val="FFFFFF"/>
+                    </a:solidFill>
+                  </a:tcPr>
+                </a:tc>
+                <a:tc>
+                  <a:txBody>
+                    <a:bodyPr/>
+                    <a:lstStyle/>
+                    <a:p>
+                      <a:pPr algn="ctr" indent="0" marL="0">
+                        <a:buNone/>
+                      </a:pPr>
+                      <a:r>
+                        <a:rPr lang="en-US" sz="900" dirty="0">
+                          <a:solidFill>
+                            <a:srgbClr val="000000"/>
+                          </a:solidFill>
+                          <a:latin typeface="Arial" pitchFamily="34" charset="0"/>
+                          <a:ea typeface="Arial" pitchFamily="34" charset="-122"/>
+                          <a:cs typeface="Arial" pitchFamily="34" charset="-120"/>
+                        </a:rPr>
+                        <a:t>6.00</a:t>
                       </a:r>
                       <a:endParaRPr lang="en-US" sz="900" dirty="0">
                         <a:latin typeface="Arial" charset="0"/>
@@ -7458,7 +7424,7 @@
                 <a:ea typeface="Arial" pitchFamily="34" charset="-122"/>
                 <a:cs typeface="Arial" pitchFamily="34" charset="-120"/>
               </a:rPr>
-              <a:t>49件（72.1%）</a:t>
+              <a:t>20件（66.7%）</a:t>
             </a:r>
             <a:endParaRPr lang="en-US" sz="1100" dirty="0"/>
           </a:p>
@@ -7556,7 +7522,7 @@
                 <a:ea typeface="Arial" pitchFamily="34" charset="-122"/>
                 <a:cs typeface="Arial" pitchFamily="34" charset="-120"/>
               </a:rPr>
-              <a:t>18件（26.5%）</a:t>
+              <a:t>10件（33.3%）</a:t>
             </a:r>
             <a:endParaRPr lang="en-US" sz="1100" dirty="0"/>
           </a:p>
@@ -7577,7 +7543,7 @@
             <a:avLst/>
           </a:prstGeom>
           <a:solidFill>
-            <a:srgbClr val="FEE2E2"/>
+            <a:srgbClr val="DCFCE7"/>
           </a:solidFill>
           <a:ln/>
         </p:spPr>
@@ -7609,7 +7575,7 @@
             <a:r>
               <a:rPr lang="en-US" sz="1000" b="1" dirty="0">
                 <a:solidFill>
-                  <a:srgbClr val="DC2626"/>
+                  <a:srgbClr val="16A34A"/>
                 </a:solidFill>
                 <a:latin typeface="Arial" pitchFamily="34" charset="0"/>
                 <a:ea typeface="Arial" pitchFamily="34" charset="-122"/>
@@ -7648,13 +7614,13 @@
             <a:r>
               <a:rPr lang="en-US" sz="1100" b="1" dirty="0">
                 <a:solidFill>
-                  <a:srgbClr val="DC2626"/>
+                  <a:srgbClr val="16A34A"/>
                 </a:solidFill>
                 <a:latin typeface="Arial" pitchFamily="34" charset="0"/>
                 <a:ea typeface="Arial" pitchFamily="34" charset="-122"/>
                 <a:cs typeface="Arial" pitchFamily="34" charset="-120"/>
               </a:rPr>
-              <a:t>1件（1.5%）</a:t>
+              <a:t>0件（0.0%）</a:t>
             </a:r>
             <a:endParaRPr lang="en-US" sz="1100" dirty="0"/>
           </a:p>
@@ -7988,7 +7954,7 @@
                 <a:ea typeface="Arial" pitchFamily="34" charset="-122"/>
                 <a:cs typeface="Arial" pitchFamily="34" charset="-120"/>
               </a:rPr>
-              <a:t>52件</a:t>
+              <a:t>19件</a:t>
             </a:r>
             <a:endParaRPr lang="en-US" sz="900" dirty="0"/>
           </a:p>
@@ -8211,7 +8177,7 @@
                 <a:ea typeface="Arial" pitchFamily="34" charset="-122"/>
                 <a:cs typeface="Arial" pitchFamily="34" charset="-120"/>
               </a:rPr>
-              <a:t>35件</a:t>
+              <a:t>18件</a:t>
             </a:r>
             <a:endParaRPr lang="en-US" sz="900" dirty="0"/>
           </a:p>
@@ -8226,6 +8192,452 @@
         <p:spPr>
           <a:xfrm>
             <a:off x="3429000" y="1124712"/>
+            <a:ext cx="1645920" cy="274320"/>
+          </a:xfrm>
+          <a:prstGeom prst="rect">
+            <a:avLst/>
+          </a:prstGeom>
+          <a:noFill/>
+          <a:ln/>
+        </p:spPr>
+        <p:txBody>
+          <a:bodyPr wrap="square" lIns="0" tIns="0" rIns="0" bIns="0" rtlCol="0" anchor="ctr"/>
+          <a:lstStyle/>
+          <a:p>
+            <a:pPr indent="0" marL="0">
+              <a:buNone/>
+            </a:pPr>
+            <a:r>
+              <a:rPr lang="en-US" sz="1300" b="1" dirty="0">
+                <a:solidFill>
+                  <a:srgbClr val="1A2744"/>
+                </a:solidFill>
+                <a:latin typeface="Arial" pitchFamily="34" charset="0"/>
+                <a:ea typeface="Arial" pitchFamily="34" charset="-122"/>
+                <a:cs typeface="Arial" pitchFamily="34" charset="-120"/>
+              </a:rPr>
+              <a:t>立地・アクセス</a:t>
+            </a:r>
+            <a:endParaRPr lang="en-US" sz="1300" dirty="0"/>
+          </a:p>
+        </p:txBody>
+      </p:sp>
+      <p:sp>
+        <p:nvSpPr>
+          <p:cNvPr id="17" name="Text 15"/>
+          <p:cNvSpPr/>
+          <p:nvPr/>
+        </p:nvSpPr>
+        <p:spPr>
+          <a:xfrm>
+            <a:off x="3429000" y="1417320"/>
+            <a:ext cx="2377440" cy="365760"/>
+          </a:xfrm>
+          <a:prstGeom prst="rect">
+            <a:avLst/>
+          </a:prstGeom>
+          <a:noFill/>
+          <a:ln/>
+        </p:spPr>
+        <p:txBody>
+          <a:bodyPr wrap="square" lIns="0" tIns="0" rIns="0" bIns="0" rtlCol="0" anchor="ctr"/>
+          <a:lstStyle/>
+          <a:p>
+            <a:pPr indent="0" marL="0">
+              <a:buNone/>
+            </a:pPr>
+            <a:r>
+              <a:rPr lang="en-US" sz="900" dirty="0">
+                <a:solidFill>
+                  <a:srgbClr val="64748B"/>
+                </a:solidFill>
+                <a:latin typeface="Arial" pitchFamily="34" charset="0"/>
+                <a:ea typeface="Arial" pitchFamily="34" charset="-122"/>
+                <a:cs typeface="Arial" pitchFamily="34" charset="-120"/>
+              </a:rPr>
+              <a:t>駅近・交通利便性に関する好評価</a:t>
+            </a:r>
+            <a:endParaRPr lang="en-US" sz="900" dirty="0"/>
+          </a:p>
+        </p:txBody>
+      </p:sp>
+      <p:sp>
+        <p:nvSpPr>
+          <p:cNvPr id="18" name="Text 16"/>
+          <p:cNvSpPr/>
+          <p:nvPr/>
+        </p:nvSpPr>
+        <p:spPr>
+          <a:xfrm>
+            <a:off x="3429000" y="1828800"/>
+            <a:ext cx="2377440" cy="640080"/>
+          </a:xfrm>
+          <a:prstGeom prst="rect">
+            <a:avLst/>
+          </a:prstGeom>
+          <a:noFill/>
+          <a:ln/>
+        </p:spPr>
+        <p:txBody>
+          <a:bodyPr wrap="square" lIns="0" tIns="0" rIns="0" bIns="0" rtlCol="0" anchor="ctr"/>
+          <a:lstStyle/>
+          <a:p>
+            <a:pPr indent="0" marL="0">
+              <a:buNone/>
+            </a:pPr>
+            <a:r>
+              <a:rPr lang="en-US" sz="900" i="1" dirty="0">
+                <a:solidFill>
+                  <a:srgbClr val="3B7DD8"/>
+                </a:solidFill>
+                <a:latin typeface="Arial" pitchFamily="34" charset="0"/>
+                <a:ea typeface="Arial" pitchFamily="34" charset="-122"/>
+                <a:cs typeface="Arial" pitchFamily="34" charset="-120"/>
+              </a:rPr>
+              <a:t>「駅から比較的近くて便利。 部屋は清潔感あるし、浴衣」</a:t>
+            </a:r>
+            <a:endParaRPr lang="en-US" sz="900" dirty="0"/>
+          </a:p>
+        </p:txBody>
+      </p:sp>
+      <p:sp>
+        <p:nvSpPr>
+          <p:cNvPr id="19" name="Shape 17"/>
+          <p:cNvSpPr/>
+          <p:nvPr/>
+        </p:nvSpPr>
+        <p:spPr>
+          <a:xfrm>
+            <a:off x="6126480" y="1051560"/>
+            <a:ext cx="2651760" cy="1600200"/>
+          </a:xfrm>
+          <a:prstGeom prst="rect">
+            <a:avLst/>
+          </a:prstGeom>
+          <a:solidFill>
+            <a:srgbClr val="FFFFFF"/>
+          </a:solidFill>
+          <a:ln/>
+          <a:effectLst>
+            <a:outerShdw sx="100000" sy="100000" kx="0" ky="0" algn="bl" rotWithShape="0" blurRad="50800" dist="25400" dir="8100000">
+              <a:srgbClr val="000000">
+                <a:alpha val="10000"/>
+              </a:srgbClr>
+            </a:outerShdw>
+          </a:effectLst>
+        </p:spPr>
+      </p:sp>
+      <p:sp>
+        <p:nvSpPr>
+          <p:cNvPr id="20" name="Shape 18"/>
+          <p:cNvSpPr/>
+          <p:nvPr/>
+        </p:nvSpPr>
+        <p:spPr>
+          <a:xfrm>
+            <a:off x="6126480" y="1051560"/>
+            <a:ext cx="54864" cy="1600200"/>
+          </a:xfrm>
+          <a:prstGeom prst="rect">
+            <a:avLst/>
+          </a:prstGeom>
+          <a:solidFill>
+            <a:srgbClr val="16A34A"/>
+          </a:solidFill>
+          <a:ln/>
+        </p:spPr>
+      </p:sp>
+      <p:sp>
+        <p:nvSpPr>
+          <p:cNvPr id="21" name="Shape 19"/>
+          <p:cNvSpPr/>
+          <p:nvPr/>
+        </p:nvSpPr>
+        <p:spPr>
+          <a:xfrm>
+            <a:off x="7955280" y="1124712"/>
+            <a:ext cx="658368" cy="228600"/>
+          </a:xfrm>
+          <a:prstGeom prst="rect">
+            <a:avLst/>
+          </a:prstGeom>
+          <a:solidFill>
+            <a:srgbClr val="DCFCE7"/>
+          </a:solidFill>
+          <a:ln/>
+        </p:spPr>
+      </p:sp>
+      <p:sp>
+        <p:nvSpPr>
+          <p:cNvPr id="22" name="Text 20"/>
+          <p:cNvSpPr/>
+          <p:nvPr/>
+        </p:nvSpPr>
+        <p:spPr>
+          <a:xfrm>
+            <a:off x="7955280" y="1124712"/>
+            <a:ext cx="658368" cy="228600"/>
+          </a:xfrm>
+          <a:prstGeom prst="rect">
+            <a:avLst/>
+          </a:prstGeom>
+          <a:noFill/>
+          <a:ln/>
+        </p:spPr>
+        <p:txBody>
+          <a:bodyPr wrap="square" lIns="0" tIns="0" rIns="0" bIns="0" rtlCol="0" anchor="ctr"/>
+          <a:lstStyle/>
+          <a:p>
+            <a:pPr algn="ctr" indent="0" marL="0">
+              <a:buNone/>
+            </a:pPr>
+            <a:r>
+              <a:rPr lang="en-US" sz="900" b="1" dirty="0">
+                <a:solidFill>
+                  <a:srgbClr val="16A34A"/>
+                </a:solidFill>
+                <a:latin typeface="Arial" pitchFamily="34" charset="0"/>
+                <a:ea typeface="Arial" pitchFamily="34" charset="-122"/>
+                <a:cs typeface="Arial" pitchFamily="34" charset="-120"/>
+              </a:rPr>
+              <a:t>15件</a:t>
+            </a:r>
+            <a:endParaRPr lang="en-US" sz="900" dirty="0"/>
+          </a:p>
+        </p:txBody>
+      </p:sp>
+      <p:sp>
+        <p:nvSpPr>
+          <p:cNvPr id="23" name="Text 21"/>
+          <p:cNvSpPr/>
+          <p:nvPr/>
+        </p:nvSpPr>
+        <p:spPr>
+          <a:xfrm>
+            <a:off x="6263640" y="1124712"/>
+            <a:ext cx="1645920" cy="274320"/>
+          </a:xfrm>
+          <a:prstGeom prst="rect">
+            <a:avLst/>
+          </a:prstGeom>
+          <a:noFill/>
+          <a:ln/>
+        </p:spPr>
+        <p:txBody>
+          <a:bodyPr wrap="square" lIns="0" tIns="0" rIns="0" bIns="0" rtlCol="0" anchor="ctr"/>
+          <a:lstStyle/>
+          <a:p>
+            <a:pPr indent="0" marL="0">
+              <a:buNone/>
+            </a:pPr>
+            <a:r>
+              <a:rPr lang="en-US" sz="1300" b="1" dirty="0">
+                <a:solidFill>
+                  <a:srgbClr val="1A2744"/>
+                </a:solidFill>
+                <a:latin typeface="Arial" pitchFamily="34" charset="0"/>
+                <a:ea typeface="Arial" pitchFamily="34" charset="-122"/>
+                <a:cs typeface="Arial" pitchFamily="34" charset="-120"/>
+              </a:rPr>
+              <a:t>清潔感</a:t>
+            </a:r>
+            <a:endParaRPr lang="en-US" sz="1300" dirty="0"/>
+          </a:p>
+        </p:txBody>
+      </p:sp>
+      <p:sp>
+        <p:nvSpPr>
+          <p:cNvPr id="24" name="Text 22"/>
+          <p:cNvSpPr/>
+          <p:nvPr/>
+        </p:nvSpPr>
+        <p:spPr>
+          <a:xfrm>
+            <a:off x="6263640" y="1417320"/>
+            <a:ext cx="2377440" cy="365760"/>
+          </a:xfrm>
+          <a:prstGeom prst="rect">
+            <a:avLst/>
+          </a:prstGeom>
+          <a:noFill/>
+          <a:ln/>
+        </p:spPr>
+        <p:txBody>
+          <a:bodyPr wrap="square" lIns="0" tIns="0" rIns="0" bIns="0" rtlCol="0" anchor="ctr"/>
+          <a:lstStyle/>
+          <a:p>
+            <a:pPr indent="0" marL="0">
+              <a:buNone/>
+            </a:pPr>
+            <a:r>
+              <a:rPr lang="en-US" sz="900" dirty="0">
+                <a:solidFill>
+                  <a:srgbClr val="64748B"/>
+                </a:solidFill>
+                <a:latin typeface="Arial" pitchFamily="34" charset="0"/>
+                <a:ea typeface="Arial" pitchFamily="34" charset="-122"/>
+                <a:cs typeface="Arial" pitchFamily="34" charset="-120"/>
+              </a:rPr>
+              <a:t>客室・共用部の清潔さへの高評価</a:t>
+            </a:r>
+            <a:endParaRPr lang="en-US" sz="900" dirty="0"/>
+          </a:p>
+        </p:txBody>
+      </p:sp>
+      <p:sp>
+        <p:nvSpPr>
+          <p:cNvPr id="25" name="Text 23"/>
+          <p:cNvSpPr/>
+          <p:nvPr/>
+        </p:nvSpPr>
+        <p:spPr>
+          <a:xfrm>
+            <a:off x="6263640" y="1828800"/>
+            <a:ext cx="2377440" cy="640080"/>
+          </a:xfrm>
+          <a:prstGeom prst="rect">
+            <a:avLst/>
+          </a:prstGeom>
+          <a:noFill/>
+          <a:ln/>
+        </p:spPr>
+        <p:txBody>
+          <a:bodyPr wrap="square" lIns="0" tIns="0" rIns="0" bIns="0" rtlCol="0" anchor="ctr"/>
+          <a:lstStyle/>
+          <a:p>
+            <a:pPr indent="0" marL="0">
+              <a:buNone/>
+            </a:pPr>
+            <a:r>
+              <a:rPr lang="en-US" sz="900" i="1" dirty="0">
+                <a:solidFill>
+                  <a:srgbClr val="3B7DD8"/>
+                </a:solidFill>
+                <a:latin typeface="Arial" pitchFamily="34" charset="0"/>
+                <a:ea typeface="Arial" pitchFamily="34" charset="-122"/>
+                <a:cs typeface="Arial" pitchFamily="34" charset="-120"/>
+              </a:rPr>
+              <a:t>「。 部屋は清潔感あるし、浴衣あったりアメニティなども充実して」</a:t>
+            </a:r>
+            <a:endParaRPr lang="en-US" sz="900" dirty="0"/>
+          </a:p>
+        </p:txBody>
+      </p:sp>
+      <p:sp>
+        <p:nvSpPr>
+          <p:cNvPr id="26" name="Shape 24"/>
+          <p:cNvSpPr/>
+          <p:nvPr/>
+        </p:nvSpPr>
+        <p:spPr>
+          <a:xfrm>
+            <a:off x="457200" y="2880360"/>
+            <a:ext cx="2651760" cy="1600200"/>
+          </a:xfrm>
+          <a:prstGeom prst="rect">
+            <a:avLst/>
+          </a:prstGeom>
+          <a:solidFill>
+            <a:srgbClr val="FFFFFF"/>
+          </a:solidFill>
+          <a:ln/>
+          <a:effectLst>
+            <a:outerShdw sx="100000" sy="100000" kx="0" ky="0" algn="bl" rotWithShape="0" blurRad="50800" dist="25400" dir="8100000">
+              <a:srgbClr val="000000">
+                <a:alpha val="10000"/>
+              </a:srgbClr>
+            </a:outerShdw>
+          </a:effectLst>
+        </p:spPr>
+      </p:sp>
+      <p:sp>
+        <p:nvSpPr>
+          <p:cNvPr id="27" name="Shape 25"/>
+          <p:cNvSpPr/>
+          <p:nvPr/>
+        </p:nvSpPr>
+        <p:spPr>
+          <a:xfrm>
+            <a:off x="457200" y="2880360"/>
+            <a:ext cx="54864" cy="1600200"/>
+          </a:xfrm>
+          <a:prstGeom prst="rect">
+            <a:avLst/>
+          </a:prstGeom>
+          <a:solidFill>
+            <a:srgbClr val="16A34A"/>
+          </a:solidFill>
+          <a:ln/>
+        </p:spPr>
+      </p:sp>
+      <p:sp>
+        <p:nvSpPr>
+          <p:cNvPr id="28" name="Shape 26"/>
+          <p:cNvSpPr/>
+          <p:nvPr/>
+        </p:nvSpPr>
+        <p:spPr>
+          <a:xfrm>
+            <a:off x="2286000" y="2953512"/>
+            <a:ext cx="658368" cy="228600"/>
+          </a:xfrm>
+          <a:prstGeom prst="rect">
+            <a:avLst/>
+          </a:prstGeom>
+          <a:solidFill>
+            <a:srgbClr val="DCFCE7"/>
+          </a:solidFill>
+          <a:ln/>
+        </p:spPr>
+      </p:sp>
+      <p:sp>
+        <p:nvSpPr>
+          <p:cNvPr id="29" name="Text 27"/>
+          <p:cNvSpPr/>
+          <p:nvPr/>
+        </p:nvSpPr>
+        <p:spPr>
+          <a:xfrm>
+            <a:off x="2286000" y="2953512"/>
+            <a:ext cx="658368" cy="228600"/>
+          </a:xfrm>
+          <a:prstGeom prst="rect">
+            <a:avLst/>
+          </a:prstGeom>
+          <a:noFill/>
+          <a:ln/>
+        </p:spPr>
+        <p:txBody>
+          <a:bodyPr wrap="square" lIns="0" tIns="0" rIns="0" bIns="0" rtlCol="0" anchor="ctr"/>
+          <a:lstStyle/>
+          <a:p>
+            <a:pPr algn="ctr" indent="0" marL="0">
+              <a:buNone/>
+            </a:pPr>
+            <a:r>
+              <a:rPr lang="en-US" sz="900" b="1" dirty="0">
+                <a:solidFill>
+                  <a:srgbClr val="16A34A"/>
+                </a:solidFill>
+                <a:latin typeface="Arial" pitchFamily="34" charset="0"/>
+                <a:ea typeface="Arial" pitchFamily="34" charset="-122"/>
+                <a:cs typeface="Arial" pitchFamily="34" charset="-120"/>
+              </a:rPr>
+              <a:t>10件</a:t>
+            </a:r>
+            <a:endParaRPr lang="en-US" sz="900" dirty="0"/>
+          </a:p>
+        </p:txBody>
+      </p:sp>
+      <p:sp>
+        <p:nvSpPr>
+          <p:cNvPr id="30" name="Text 28"/>
+          <p:cNvSpPr/>
+          <p:nvPr/>
+        </p:nvSpPr>
+        <p:spPr>
+          <a:xfrm>
+            <a:off x="594360" y="2953512"/>
             <a:ext cx="1645920" cy="274320"/>
           </a:xfrm>
           <a:prstGeom prst="rect">
@@ -8258,13 +8670,13 @@
       </p:sp>
       <p:sp>
         <p:nvSpPr>
-          <p:cNvPr id="17" name="Text 15"/>
-          <p:cNvSpPr/>
-          <p:nvPr/>
-        </p:nvSpPr>
-        <p:spPr>
-          <a:xfrm>
-            <a:off x="3429000" y="1417320"/>
+          <p:cNvPr id="31" name="Text 29"/>
+          <p:cNvSpPr/>
+          <p:nvPr/>
+        </p:nvSpPr>
+        <p:spPr>
+          <a:xfrm>
+            <a:off x="594360" y="3246120"/>
             <a:ext cx="2377440" cy="365760"/>
           </a:xfrm>
           <a:prstGeom prst="rect">
@@ -8297,13 +8709,13 @@
       </p:sp>
       <p:sp>
         <p:nvSpPr>
-          <p:cNvPr id="18" name="Text 16"/>
-          <p:cNvSpPr/>
-          <p:nvPr/>
-        </p:nvSpPr>
-        <p:spPr>
-          <a:xfrm>
-            <a:off x="3429000" y="1828800"/>
+          <p:cNvPr id="32" name="Text 30"/>
+          <p:cNvSpPr/>
+          <p:nvPr/>
+        </p:nvSpPr>
+        <p:spPr>
+          <a:xfrm>
+            <a:off x="594360" y="3657600"/>
             <a:ext cx="2377440" cy="640080"/>
           </a:xfrm>
           <a:prstGeom prst="rect">
@@ -8336,13 +8748,13 @@
       </p:sp>
       <p:sp>
         <p:nvSpPr>
-          <p:cNvPr id="19" name="Shape 17"/>
-          <p:cNvSpPr/>
-          <p:nvPr/>
-        </p:nvSpPr>
-        <p:spPr>
-          <a:xfrm>
-            <a:off x="6126480" y="1051560"/>
+          <p:cNvPr id="33" name="Shape 31"/>
+          <p:cNvSpPr/>
+          <p:nvPr/>
+        </p:nvSpPr>
+        <p:spPr>
+          <a:xfrm>
+            <a:off x="3291840" y="2880360"/>
             <a:ext cx="2651760" cy="1600200"/>
           </a:xfrm>
           <a:prstGeom prst="rect">
@@ -8363,13 +8775,13 @@
       </p:sp>
       <p:sp>
         <p:nvSpPr>
-          <p:cNvPr id="20" name="Shape 18"/>
-          <p:cNvSpPr/>
-          <p:nvPr/>
-        </p:nvSpPr>
-        <p:spPr>
-          <a:xfrm>
-            <a:off x="6126480" y="1051560"/>
+          <p:cNvPr id="34" name="Shape 32"/>
+          <p:cNvSpPr/>
+          <p:nvPr/>
+        </p:nvSpPr>
+        <p:spPr>
+          <a:xfrm>
+            <a:off x="3291840" y="2880360"/>
             <a:ext cx="54864" cy="1600200"/>
           </a:xfrm>
           <a:prstGeom prst="rect">
@@ -8383,13 +8795,13 @@
       </p:sp>
       <p:sp>
         <p:nvSpPr>
-          <p:cNvPr id="21" name="Shape 19"/>
-          <p:cNvSpPr/>
-          <p:nvPr/>
-        </p:nvSpPr>
-        <p:spPr>
-          <a:xfrm>
-            <a:off x="7955280" y="1124712"/>
+          <p:cNvPr id="35" name="Shape 33"/>
+          <p:cNvSpPr/>
+          <p:nvPr/>
+        </p:nvSpPr>
+        <p:spPr>
+          <a:xfrm>
+            <a:off x="5120640" y="2953512"/>
             <a:ext cx="658368" cy="228600"/>
           </a:xfrm>
           <a:prstGeom prst="rect">
@@ -8403,13 +8815,13 @@
       </p:sp>
       <p:sp>
         <p:nvSpPr>
-          <p:cNvPr id="22" name="Text 20"/>
-          <p:cNvSpPr/>
-          <p:nvPr/>
-        </p:nvSpPr>
-        <p:spPr>
-          <a:xfrm>
-            <a:off x="7955280" y="1124712"/>
+          <p:cNvPr id="36" name="Text 34"/>
+          <p:cNvSpPr/>
+          <p:nvPr/>
+        </p:nvSpPr>
+        <p:spPr>
+          <a:xfrm>
+            <a:off x="5120640" y="2953512"/>
             <a:ext cx="658368" cy="228600"/>
           </a:xfrm>
           <a:prstGeom prst="rect">
@@ -8434,7 +8846,7 @@
                 <a:ea typeface="Arial" pitchFamily="34" charset="-122"/>
                 <a:cs typeface="Arial" pitchFamily="34" charset="-120"/>
               </a:rPr>
-              <a:t>29件</a:t>
+              <a:t>8件</a:t>
             </a:r>
             <a:endParaRPr lang="en-US" sz="900" dirty="0"/>
           </a:p>
@@ -8442,13 +8854,13 @@
       </p:sp>
       <p:sp>
         <p:nvSpPr>
-          <p:cNvPr id="23" name="Text 21"/>
-          <p:cNvSpPr/>
-          <p:nvPr/>
-        </p:nvSpPr>
-        <p:spPr>
-          <a:xfrm>
-            <a:off x="6263640" y="1124712"/>
+          <p:cNvPr id="37" name="Text 35"/>
+          <p:cNvSpPr/>
+          <p:nvPr/>
+        </p:nvSpPr>
+        <p:spPr>
+          <a:xfrm>
+            <a:off x="3429000" y="2953512"/>
             <a:ext cx="1645920" cy="274320"/>
           </a:xfrm>
           <a:prstGeom prst="rect">
@@ -8473,7 +8885,7 @@
                 <a:ea typeface="Arial" pitchFamily="34" charset="-122"/>
                 <a:cs typeface="Arial" pitchFamily="34" charset="-120"/>
               </a:rPr>
-              <a:t>立地・アクセス</a:t>
+              <a:t>コスパ・リピート</a:t>
             </a:r>
             <a:endParaRPr lang="en-US" sz="1300" dirty="0"/>
           </a:p>
@@ -8481,13 +8893,13 @@
       </p:sp>
       <p:sp>
         <p:nvSpPr>
-          <p:cNvPr id="24" name="Text 22"/>
-          <p:cNvSpPr/>
-          <p:nvPr/>
-        </p:nvSpPr>
-        <p:spPr>
-          <a:xfrm>
-            <a:off x="6263640" y="1417320"/>
+          <p:cNvPr id="38" name="Text 36"/>
+          <p:cNvSpPr/>
+          <p:nvPr/>
+        </p:nvSpPr>
+        <p:spPr>
+          <a:xfrm>
+            <a:off x="3429000" y="3246120"/>
             <a:ext cx="2377440" cy="365760"/>
           </a:xfrm>
           <a:prstGeom prst="rect">
@@ -8512,7 +8924,7 @@
                 <a:ea typeface="Arial" pitchFamily="34" charset="-122"/>
                 <a:cs typeface="Arial" pitchFamily="34" charset="-120"/>
               </a:rPr>
-              <a:t>駅近・交通利便性に関する好評価</a:t>
+              <a:t>価格対価値の高さとリピート意向</a:t>
             </a:r>
             <a:endParaRPr lang="en-US" sz="900" dirty="0"/>
           </a:p>
@@ -8520,13 +8932,13 @@
       </p:sp>
       <p:sp>
         <p:nvSpPr>
-          <p:cNvPr id="25" name="Text 23"/>
-          <p:cNvSpPr/>
-          <p:nvPr/>
-        </p:nvSpPr>
-        <p:spPr>
-          <a:xfrm>
-            <a:off x="6263640" y="1828800"/>
+          <p:cNvPr id="39" name="Text 37"/>
+          <p:cNvSpPr/>
+          <p:nvPr/>
+        </p:nvSpPr>
+        <p:spPr>
+          <a:xfrm>
+            <a:off x="3429000" y="3657600"/>
             <a:ext cx="2377440" cy="640080"/>
           </a:xfrm>
           <a:prstGeom prst="rect">
@@ -8551,7 +8963,7 @@
                 <a:ea typeface="Arial" pitchFamily="34" charset="-122"/>
                 <a:cs typeface="Arial" pitchFamily="34" charset="-120"/>
               </a:rPr>
-              <a:t>「駅から比較的近くて便利。 部屋は清潔感あるし、浴衣」</a:t>
+              <a:t>「食にも大変満足しました。」</a:t>
             </a:r>
             <a:endParaRPr lang="en-US" sz="900" dirty="0"/>
           </a:p>
@@ -8559,13 +8971,13 @@
       </p:sp>
       <p:sp>
         <p:nvSpPr>
-          <p:cNvPr id="26" name="Shape 24"/>
-          <p:cNvSpPr/>
-          <p:nvPr/>
-        </p:nvSpPr>
-        <p:spPr>
-          <a:xfrm>
-            <a:off x="457200" y="2880360"/>
+          <p:cNvPr id="40" name="Shape 38"/>
+          <p:cNvSpPr/>
+          <p:nvPr/>
+        </p:nvSpPr>
+        <p:spPr>
+          <a:xfrm>
+            <a:off x="6126480" y="2880360"/>
             <a:ext cx="2651760" cy="1600200"/>
           </a:xfrm>
           <a:prstGeom prst="rect">
@@ -8586,13 +8998,13 @@
       </p:sp>
       <p:sp>
         <p:nvSpPr>
-          <p:cNvPr id="27" name="Shape 25"/>
-          <p:cNvSpPr/>
-          <p:nvPr/>
-        </p:nvSpPr>
-        <p:spPr>
-          <a:xfrm>
-            <a:off x="457200" y="2880360"/>
+          <p:cNvPr id="41" name="Shape 39"/>
+          <p:cNvSpPr/>
+          <p:nvPr/>
+        </p:nvSpPr>
+        <p:spPr>
+          <a:xfrm>
+            <a:off x="6126480" y="2880360"/>
             <a:ext cx="54864" cy="1600200"/>
           </a:xfrm>
           <a:prstGeom prst="rect">
@@ -8606,13 +9018,13 @@
       </p:sp>
       <p:sp>
         <p:nvSpPr>
-          <p:cNvPr id="28" name="Shape 26"/>
-          <p:cNvSpPr/>
-          <p:nvPr/>
-        </p:nvSpPr>
-        <p:spPr>
-          <a:xfrm>
-            <a:off x="2286000" y="2953512"/>
+          <p:cNvPr id="42" name="Shape 40"/>
+          <p:cNvSpPr/>
+          <p:nvPr/>
+        </p:nvSpPr>
+        <p:spPr>
+          <a:xfrm>
+            <a:off x="7955280" y="2953512"/>
             <a:ext cx="658368" cy="228600"/>
           </a:xfrm>
           <a:prstGeom prst="rect">
@@ -8626,13 +9038,13 @@
       </p:sp>
       <p:sp>
         <p:nvSpPr>
-          <p:cNvPr id="29" name="Text 27"/>
-          <p:cNvSpPr/>
-          <p:nvPr/>
-        </p:nvSpPr>
-        <p:spPr>
-          <a:xfrm>
-            <a:off x="2286000" y="2953512"/>
+          <p:cNvPr id="43" name="Text 41"/>
+          <p:cNvSpPr/>
+          <p:nvPr/>
+        </p:nvSpPr>
+        <p:spPr>
+          <a:xfrm>
+            <a:off x="7955280" y="2953512"/>
             <a:ext cx="658368" cy="228600"/>
           </a:xfrm>
           <a:prstGeom prst="rect">
@@ -8657,7 +9069,7 @@
                 <a:ea typeface="Arial" pitchFamily="34" charset="-122"/>
                 <a:cs typeface="Arial" pitchFamily="34" charset="-120"/>
               </a:rPr>
-              <a:t>29件</a:t>
+              <a:t>6件</a:t>
             </a:r>
             <a:endParaRPr lang="en-US" sz="900" dirty="0"/>
           </a:p>
@@ -8665,236 +9077,13 @@
       </p:sp>
       <p:sp>
         <p:nvSpPr>
-          <p:cNvPr id="30" name="Text 28"/>
-          <p:cNvSpPr/>
-          <p:nvPr/>
-        </p:nvSpPr>
-        <p:spPr>
-          <a:xfrm>
-            <a:off x="594360" y="2953512"/>
-            <a:ext cx="1645920" cy="274320"/>
-          </a:xfrm>
-          <a:prstGeom prst="rect">
-            <a:avLst/>
-          </a:prstGeom>
-          <a:noFill/>
-          <a:ln/>
-        </p:spPr>
-        <p:txBody>
-          <a:bodyPr wrap="square" lIns="0" tIns="0" rIns="0" bIns="0" rtlCol="0" anchor="ctr"/>
-          <a:lstStyle/>
-          <a:p>
-            <a:pPr indent="0" marL="0">
-              <a:buNone/>
-            </a:pPr>
-            <a:r>
-              <a:rPr lang="en-US" sz="1300" b="1" dirty="0">
-                <a:solidFill>
-                  <a:srgbClr val="1A2744"/>
-                </a:solidFill>
-                <a:latin typeface="Arial" pitchFamily="34" charset="0"/>
-                <a:ea typeface="Arial" pitchFamily="34" charset="-122"/>
-                <a:cs typeface="Arial" pitchFamily="34" charset="-120"/>
-              </a:rPr>
-              <a:t>清潔感</a:t>
-            </a:r>
-            <a:endParaRPr lang="en-US" sz="1300" dirty="0"/>
-          </a:p>
-        </p:txBody>
-      </p:sp>
-      <p:sp>
-        <p:nvSpPr>
-          <p:cNvPr id="31" name="Text 29"/>
-          <p:cNvSpPr/>
-          <p:nvPr/>
-        </p:nvSpPr>
-        <p:spPr>
-          <a:xfrm>
-            <a:off x="594360" y="3246120"/>
-            <a:ext cx="2377440" cy="365760"/>
-          </a:xfrm>
-          <a:prstGeom prst="rect">
-            <a:avLst/>
-          </a:prstGeom>
-          <a:noFill/>
-          <a:ln/>
-        </p:spPr>
-        <p:txBody>
-          <a:bodyPr wrap="square" lIns="0" tIns="0" rIns="0" bIns="0" rtlCol="0" anchor="ctr"/>
-          <a:lstStyle/>
-          <a:p>
-            <a:pPr indent="0" marL="0">
-              <a:buNone/>
-            </a:pPr>
-            <a:r>
-              <a:rPr lang="en-US" sz="900" dirty="0">
-                <a:solidFill>
-                  <a:srgbClr val="64748B"/>
-                </a:solidFill>
-                <a:latin typeface="Arial" pitchFamily="34" charset="0"/>
-                <a:ea typeface="Arial" pitchFamily="34" charset="-122"/>
-                <a:cs typeface="Arial" pitchFamily="34" charset="-120"/>
-              </a:rPr>
-              <a:t>客室・共用部の清潔さへの高評価</a:t>
-            </a:r>
-            <a:endParaRPr lang="en-US" sz="900" dirty="0"/>
-          </a:p>
-        </p:txBody>
-      </p:sp>
-      <p:sp>
-        <p:nvSpPr>
-          <p:cNvPr id="32" name="Text 30"/>
-          <p:cNvSpPr/>
-          <p:nvPr/>
-        </p:nvSpPr>
-        <p:spPr>
-          <a:xfrm>
-            <a:off x="594360" y="3657600"/>
-            <a:ext cx="2377440" cy="640080"/>
-          </a:xfrm>
-          <a:prstGeom prst="rect">
-            <a:avLst/>
-          </a:prstGeom>
-          <a:noFill/>
-          <a:ln/>
-        </p:spPr>
-        <p:txBody>
-          <a:bodyPr wrap="square" lIns="0" tIns="0" rIns="0" bIns="0" rtlCol="0" anchor="ctr"/>
-          <a:lstStyle/>
-          <a:p>
-            <a:pPr indent="0" marL="0">
-              <a:buNone/>
-            </a:pPr>
-            <a:r>
-              <a:rPr lang="en-US" sz="900" i="1" dirty="0">
-                <a:solidFill>
-                  <a:srgbClr val="3B7DD8"/>
-                </a:solidFill>
-                <a:latin typeface="Arial" pitchFamily="34" charset="0"/>
-                <a:ea typeface="Arial" pitchFamily="34" charset="-122"/>
-                <a:cs typeface="Arial" pitchFamily="34" charset="-120"/>
-              </a:rPr>
-              <a:t>「。 部屋は清潔感あるし、浴衣あったりアメニティなども充実して」</a:t>
-            </a:r>
-            <a:endParaRPr lang="en-US" sz="900" dirty="0"/>
-          </a:p>
-        </p:txBody>
-      </p:sp>
-      <p:sp>
-        <p:nvSpPr>
-          <p:cNvPr id="33" name="Shape 31"/>
-          <p:cNvSpPr/>
-          <p:nvPr/>
-        </p:nvSpPr>
-        <p:spPr>
-          <a:xfrm>
-            <a:off x="3291840" y="2880360"/>
-            <a:ext cx="2651760" cy="1600200"/>
-          </a:xfrm>
-          <a:prstGeom prst="rect">
-            <a:avLst/>
-          </a:prstGeom>
-          <a:solidFill>
-            <a:srgbClr val="FFFFFF"/>
-          </a:solidFill>
-          <a:ln/>
-          <a:effectLst>
-            <a:outerShdw sx="100000" sy="100000" kx="0" ky="0" algn="bl" rotWithShape="0" blurRad="50800" dist="25400" dir="8100000">
-              <a:srgbClr val="000000">
-                <a:alpha val="10000"/>
-              </a:srgbClr>
-            </a:outerShdw>
-          </a:effectLst>
-        </p:spPr>
-      </p:sp>
-      <p:sp>
-        <p:nvSpPr>
-          <p:cNvPr id="34" name="Shape 32"/>
-          <p:cNvSpPr/>
-          <p:nvPr/>
-        </p:nvSpPr>
-        <p:spPr>
-          <a:xfrm>
-            <a:off x="3291840" y="2880360"/>
-            <a:ext cx="54864" cy="1600200"/>
-          </a:xfrm>
-          <a:prstGeom prst="rect">
-            <a:avLst/>
-          </a:prstGeom>
-          <a:solidFill>
-            <a:srgbClr val="16A34A"/>
-          </a:solidFill>
-          <a:ln/>
-        </p:spPr>
-      </p:sp>
-      <p:sp>
-        <p:nvSpPr>
-          <p:cNvPr id="35" name="Shape 33"/>
-          <p:cNvSpPr/>
-          <p:nvPr/>
-        </p:nvSpPr>
-        <p:spPr>
-          <a:xfrm>
-            <a:off x="5120640" y="2953512"/>
-            <a:ext cx="658368" cy="228600"/>
-          </a:xfrm>
-          <a:prstGeom prst="rect">
-            <a:avLst/>
-          </a:prstGeom>
-          <a:solidFill>
-            <a:srgbClr val="DCFCE7"/>
-          </a:solidFill>
-          <a:ln/>
-        </p:spPr>
-      </p:sp>
-      <p:sp>
-        <p:nvSpPr>
-          <p:cNvPr id="36" name="Text 34"/>
-          <p:cNvSpPr/>
-          <p:nvPr/>
-        </p:nvSpPr>
-        <p:spPr>
-          <a:xfrm>
-            <a:off x="5120640" y="2953512"/>
-            <a:ext cx="658368" cy="228600"/>
-          </a:xfrm>
-          <a:prstGeom prst="rect">
-            <a:avLst/>
-          </a:prstGeom>
-          <a:noFill/>
-          <a:ln/>
-        </p:spPr>
-        <p:txBody>
-          <a:bodyPr wrap="square" lIns="0" tIns="0" rIns="0" bIns="0" rtlCol="0" anchor="ctr"/>
-          <a:lstStyle/>
-          <a:p>
-            <a:pPr algn="ctr" indent="0" marL="0">
-              <a:buNone/>
-            </a:pPr>
-            <a:r>
-              <a:rPr lang="en-US" sz="900" b="1" dirty="0">
-                <a:solidFill>
-                  <a:srgbClr val="16A34A"/>
-                </a:solidFill>
-                <a:latin typeface="Arial" pitchFamily="34" charset="0"/>
-                <a:ea typeface="Arial" pitchFamily="34" charset="-122"/>
-                <a:cs typeface="Arial" pitchFamily="34" charset="-120"/>
-              </a:rPr>
-              <a:t>22件</a:t>
-            </a:r>
-            <a:endParaRPr lang="en-US" sz="900" dirty="0"/>
-          </a:p>
-        </p:txBody>
-      </p:sp>
-      <p:sp>
-        <p:nvSpPr>
-          <p:cNvPr id="37" name="Text 35"/>
-          <p:cNvSpPr/>
-          <p:nvPr/>
-        </p:nvSpPr>
-        <p:spPr>
-          <a:xfrm>
-            <a:off x="3429000" y="2953512"/>
+          <p:cNvPr id="44" name="Text 42"/>
+          <p:cNvSpPr/>
+          <p:nvPr/>
+        </p:nvSpPr>
+        <p:spPr>
+          <a:xfrm>
+            <a:off x="6263640" y="2953512"/>
             <a:ext cx="1645920" cy="274320"/>
           </a:xfrm>
           <a:prstGeom prst="rect">
@@ -8927,13 +9116,13 @@
       </p:sp>
       <p:sp>
         <p:nvSpPr>
-          <p:cNvPr id="38" name="Text 36"/>
-          <p:cNvSpPr/>
-          <p:nvPr/>
-        </p:nvSpPr>
-        <p:spPr>
-          <a:xfrm>
-            <a:off x="3429000" y="3246120"/>
+          <p:cNvPr id="45" name="Text 43"/>
+          <p:cNvSpPr/>
+          <p:nvPr/>
+        </p:nvSpPr>
+        <p:spPr>
+          <a:xfrm>
+            <a:off x="6263640" y="3246120"/>
             <a:ext cx="2377440" cy="365760"/>
           </a:xfrm>
           <a:prstGeom prst="rect">
@@ -8966,13 +9155,13 @@
       </p:sp>
       <p:sp>
         <p:nvSpPr>
-          <p:cNvPr id="39" name="Text 37"/>
-          <p:cNvSpPr/>
-          <p:nvPr/>
-        </p:nvSpPr>
-        <p:spPr>
-          <a:xfrm>
-            <a:off x="3429000" y="3657600"/>
+          <p:cNvPr id="46" name="Text 44"/>
+          <p:cNvSpPr/>
+          <p:nvPr/>
+        </p:nvSpPr>
+        <p:spPr>
+          <a:xfrm>
+            <a:off x="6263640" y="3657600"/>
             <a:ext cx="2377440" cy="640080"/>
           </a:xfrm>
           <a:prstGeom prst="rect">
@@ -8998,229 +9187,6 @@
                 <a:cs typeface="Arial" pitchFamily="34" charset="-120"/>
               </a:rPr>
               <a:t>「たですが、朝食にも大変満足しました。」</a:t>
-            </a:r>
-            <a:endParaRPr lang="en-US" sz="900" dirty="0"/>
-          </a:p>
-        </p:txBody>
-      </p:sp>
-      <p:sp>
-        <p:nvSpPr>
-          <p:cNvPr id="40" name="Shape 38"/>
-          <p:cNvSpPr/>
-          <p:nvPr/>
-        </p:nvSpPr>
-        <p:spPr>
-          <a:xfrm>
-            <a:off x="6126480" y="2880360"/>
-            <a:ext cx="2651760" cy="1600200"/>
-          </a:xfrm>
-          <a:prstGeom prst="rect">
-            <a:avLst/>
-          </a:prstGeom>
-          <a:solidFill>
-            <a:srgbClr val="FFFFFF"/>
-          </a:solidFill>
-          <a:ln/>
-          <a:effectLst>
-            <a:outerShdw sx="100000" sy="100000" kx="0" ky="0" algn="bl" rotWithShape="0" blurRad="50800" dist="25400" dir="8100000">
-              <a:srgbClr val="000000">
-                <a:alpha val="10000"/>
-              </a:srgbClr>
-            </a:outerShdw>
-          </a:effectLst>
-        </p:spPr>
-      </p:sp>
-      <p:sp>
-        <p:nvSpPr>
-          <p:cNvPr id="41" name="Shape 39"/>
-          <p:cNvSpPr/>
-          <p:nvPr/>
-        </p:nvSpPr>
-        <p:spPr>
-          <a:xfrm>
-            <a:off x="6126480" y="2880360"/>
-            <a:ext cx="54864" cy="1600200"/>
-          </a:xfrm>
-          <a:prstGeom prst="rect">
-            <a:avLst/>
-          </a:prstGeom>
-          <a:solidFill>
-            <a:srgbClr val="16A34A"/>
-          </a:solidFill>
-          <a:ln/>
-        </p:spPr>
-      </p:sp>
-      <p:sp>
-        <p:nvSpPr>
-          <p:cNvPr id="42" name="Shape 40"/>
-          <p:cNvSpPr/>
-          <p:nvPr/>
-        </p:nvSpPr>
-        <p:spPr>
-          <a:xfrm>
-            <a:off x="7955280" y="2953512"/>
-            <a:ext cx="658368" cy="228600"/>
-          </a:xfrm>
-          <a:prstGeom prst="rect">
-            <a:avLst/>
-          </a:prstGeom>
-          <a:solidFill>
-            <a:srgbClr val="DCFCE7"/>
-          </a:solidFill>
-          <a:ln/>
-        </p:spPr>
-      </p:sp>
-      <p:sp>
-        <p:nvSpPr>
-          <p:cNvPr id="43" name="Text 41"/>
-          <p:cNvSpPr/>
-          <p:nvPr/>
-        </p:nvSpPr>
-        <p:spPr>
-          <a:xfrm>
-            <a:off x="7955280" y="2953512"/>
-            <a:ext cx="658368" cy="228600"/>
-          </a:xfrm>
-          <a:prstGeom prst="rect">
-            <a:avLst/>
-          </a:prstGeom>
-          <a:noFill/>
-          <a:ln/>
-        </p:spPr>
-        <p:txBody>
-          <a:bodyPr wrap="square" lIns="0" tIns="0" rIns="0" bIns="0" rtlCol="0" anchor="ctr"/>
-          <a:lstStyle/>
-          <a:p>
-            <a:pPr algn="ctr" indent="0" marL="0">
-              <a:buNone/>
-            </a:pPr>
-            <a:r>
-              <a:rPr lang="en-US" sz="900" b="1" dirty="0">
-                <a:solidFill>
-                  <a:srgbClr val="16A34A"/>
-                </a:solidFill>
-                <a:latin typeface="Arial" pitchFamily="34" charset="0"/>
-                <a:ea typeface="Arial" pitchFamily="34" charset="-122"/>
-                <a:cs typeface="Arial" pitchFamily="34" charset="-120"/>
-              </a:rPr>
-              <a:t>18件</a:t>
-            </a:r>
-            <a:endParaRPr lang="en-US" sz="900" dirty="0"/>
-          </a:p>
-        </p:txBody>
-      </p:sp>
-      <p:sp>
-        <p:nvSpPr>
-          <p:cNvPr id="44" name="Text 42"/>
-          <p:cNvSpPr/>
-          <p:nvPr/>
-        </p:nvSpPr>
-        <p:spPr>
-          <a:xfrm>
-            <a:off x="6263640" y="2953512"/>
-            <a:ext cx="1645920" cy="274320"/>
-          </a:xfrm>
-          <a:prstGeom prst="rect">
-            <a:avLst/>
-          </a:prstGeom>
-          <a:noFill/>
-          <a:ln/>
-        </p:spPr>
-        <p:txBody>
-          <a:bodyPr wrap="square" lIns="0" tIns="0" rIns="0" bIns="0" rtlCol="0" anchor="ctr"/>
-          <a:lstStyle/>
-          <a:p>
-            <a:pPr indent="0" marL="0">
-              <a:buNone/>
-            </a:pPr>
-            <a:r>
-              <a:rPr lang="en-US" sz="1300" b="1" dirty="0">
-                <a:solidFill>
-                  <a:srgbClr val="1A2744"/>
-                </a:solidFill>
-                <a:latin typeface="Arial" pitchFamily="34" charset="0"/>
-                <a:ea typeface="Arial" pitchFamily="34" charset="-122"/>
-                <a:cs typeface="Arial" pitchFamily="34" charset="-120"/>
-              </a:rPr>
-              <a:t>コスパ・リピート</a:t>
-            </a:r>
-            <a:endParaRPr lang="en-US" sz="1300" dirty="0"/>
-          </a:p>
-        </p:txBody>
-      </p:sp>
-      <p:sp>
-        <p:nvSpPr>
-          <p:cNvPr id="45" name="Text 43"/>
-          <p:cNvSpPr/>
-          <p:nvPr/>
-        </p:nvSpPr>
-        <p:spPr>
-          <a:xfrm>
-            <a:off x="6263640" y="3246120"/>
-            <a:ext cx="2377440" cy="365760"/>
-          </a:xfrm>
-          <a:prstGeom prst="rect">
-            <a:avLst/>
-          </a:prstGeom>
-          <a:noFill/>
-          <a:ln/>
-        </p:spPr>
-        <p:txBody>
-          <a:bodyPr wrap="square" lIns="0" tIns="0" rIns="0" bIns="0" rtlCol="0" anchor="ctr"/>
-          <a:lstStyle/>
-          <a:p>
-            <a:pPr indent="0" marL="0">
-              <a:buNone/>
-            </a:pPr>
-            <a:r>
-              <a:rPr lang="en-US" sz="900" dirty="0">
-                <a:solidFill>
-                  <a:srgbClr val="64748B"/>
-                </a:solidFill>
-                <a:latin typeface="Arial" pitchFamily="34" charset="0"/>
-                <a:ea typeface="Arial" pitchFamily="34" charset="-122"/>
-                <a:cs typeface="Arial" pitchFamily="34" charset="-120"/>
-              </a:rPr>
-              <a:t>価格対価値の高さとリピート意向</a:t>
-            </a:r>
-            <a:endParaRPr lang="en-US" sz="900" dirty="0"/>
-          </a:p>
-        </p:txBody>
-      </p:sp>
-      <p:sp>
-        <p:nvSpPr>
-          <p:cNvPr id="46" name="Text 44"/>
-          <p:cNvSpPr/>
-          <p:nvPr/>
-        </p:nvSpPr>
-        <p:spPr>
-          <a:xfrm>
-            <a:off x="6263640" y="3657600"/>
-            <a:ext cx="2377440" cy="640080"/>
-          </a:xfrm>
-          <a:prstGeom prst="rect">
-            <a:avLst/>
-          </a:prstGeom>
-          <a:noFill/>
-          <a:ln/>
-        </p:spPr>
-        <p:txBody>
-          <a:bodyPr wrap="square" lIns="0" tIns="0" rIns="0" bIns="0" rtlCol="0" anchor="ctr"/>
-          <a:lstStyle/>
-          <a:p>
-            <a:pPr indent="0" marL="0">
-              <a:buNone/>
-            </a:pPr>
-            <a:r>
-              <a:rPr lang="en-US" sz="900" i="1" dirty="0">
-                <a:solidFill>
-                  <a:srgbClr val="3B7DD8"/>
-                </a:solidFill>
-                <a:latin typeface="Arial" pitchFamily="34" charset="0"/>
-                <a:ea typeface="Arial" pitchFamily="34" charset="-122"/>
-                <a:cs typeface="Arial" pitchFamily="34" charset="-120"/>
-              </a:rPr>
-              <a:t>「食にも大変満足しました。」</a:t>
             </a:r>
             <a:endParaRPr lang="en-US" sz="900" dirty="0"/>
           </a:p>
@@ -9768,554 +9734,6 @@
                       <a:r>
                         <a:rPr lang="en-US" sz="1200" b="1" dirty="0">
                           <a:solidFill>
-                            <a:srgbClr val="EA580C"/>
-                          </a:solidFill>
-                          <a:latin typeface="Arial" pitchFamily="34" charset="0"/>
-                          <a:ea typeface="Arial" pitchFamily="34" charset="-122"/>
-                          <a:cs typeface="Arial" pitchFamily="34" charset="-120"/>
-                        </a:rPr>
-                        <a:t>A</a:t>
-                      </a:r>
-                      <a:endParaRPr lang="en-US" sz="1200" dirty="0">
-                        <a:latin typeface="Arial" charset="0"/>
-                        <a:ea typeface="Arial" charset="0"/>
-                        <a:cs typeface="Arial" charset="0"/>
-                      </a:endParaRPr>
-                    </a:p>
-                  </a:txBody>
-                  <a:tcPr marL="91440" marR="91440" marT="45720" marB="45720">
-                    <a:lnL w="6350" cap="flat" cmpd="sng" algn="ctr">
-                      <a:solidFill>
-                        <a:srgbClr val="CBD5E1"/>
-                      </a:solidFill>
-                      <a:prstDash val="solid"/>
-                      <a:round/>
-                      <a:headEnd type="none" w="med" len="med"/>
-                      <a:tailEnd type="none" w="med" len="med"/>
-                    </a:lnL>
-                    <a:lnR w="6350" cap="flat" cmpd="sng" algn="ctr">
-                      <a:solidFill>
-                        <a:srgbClr val="CBD5E1"/>
-                      </a:solidFill>
-                      <a:prstDash val="solid"/>
-                      <a:round/>
-                      <a:headEnd type="none" w="med" len="med"/>
-                      <a:tailEnd type="none" w="med" len="med"/>
-                    </a:lnR>
-                    <a:lnT w="6350" cap="flat" cmpd="sng" algn="ctr">
-                      <a:solidFill>
-                        <a:srgbClr val="CBD5E1"/>
-                      </a:solidFill>
-                      <a:prstDash val="solid"/>
-                      <a:round/>
-                      <a:headEnd type="none" w="med" len="med"/>
-                      <a:tailEnd type="none" w="med" len="med"/>
-                    </a:lnT>
-                    <a:lnB w="6350" cap="flat" cmpd="sng" algn="ctr">
-                      <a:solidFill>
-                        <a:srgbClr val="CBD5E1"/>
-                      </a:solidFill>
-                      <a:prstDash val="solid"/>
-                      <a:round/>
-                      <a:headEnd type="none" w="med" len="med"/>
-                      <a:tailEnd type="none" w="med" len="med"/>
-                    </a:lnB>
-                    <a:solidFill>
-                      <a:srgbClr val="E8EFF8"/>
-                    </a:solidFill>
-                  </a:tcPr>
-                </a:tc>
-                <a:tc>
-                  <a:txBody>
-                    <a:bodyPr/>
-                    <a:lstStyle/>
-                    <a:p>
-                      <a:pPr indent="0" marL="0">
-                        <a:buNone/>
-                      </a:pPr>
-                      <a:r>
-                        <a:rPr lang="en-US" sz="900" b="1" dirty="0">
-                          <a:solidFill>
-                            <a:srgbClr val="334155"/>
-                          </a:solidFill>
-                          <a:latin typeface="Arial" pitchFamily="34" charset="0"/>
-                          <a:ea typeface="Arial" pitchFamily="34" charset="-122"/>
-                          <a:cs typeface="Arial" pitchFamily="34" charset="-120"/>
-                        </a:rPr>
-                        <a:t>騒音問題</a:t>
-                      </a:r>
-                      <a:endParaRPr lang="en-US" sz="900" dirty="0">
-                        <a:latin typeface="Arial" charset="0"/>
-                        <a:ea typeface="Arial" charset="0"/>
-                        <a:cs typeface="Arial" charset="0"/>
-                      </a:endParaRPr>
-                    </a:p>
-                  </a:txBody>
-                  <a:tcPr marL="91440" marR="91440" marT="45720" marB="45720">
-                    <a:lnL w="6350" cap="flat" cmpd="sng" algn="ctr">
-                      <a:solidFill>
-                        <a:srgbClr val="CBD5E1"/>
-                      </a:solidFill>
-                      <a:prstDash val="solid"/>
-                      <a:round/>
-                      <a:headEnd type="none" w="med" len="med"/>
-                      <a:tailEnd type="none" w="med" len="med"/>
-                    </a:lnL>
-                    <a:lnR w="6350" cap="flat" cmpd="sng" algn="ctr">
-                      <a:solidFill>
-                        <a:srgbClr val="CBD5E1"/>
-                      </a:solidFill>
-                      <a:prstDash val="solid"/>
-                      <a:round/>
-                      <a:headEnd type="none" w="med" len="med"/>
-                      <a:tailEnd type="none" w="med" len="med"/>
-                    </a:lnR>
-                    <a:lnT w="6350" cap="flat" cmpd="sng" algn="ctr">
-                      <a:solidFill>
-                        <a:srgbClr val="CBD5E1"/>
-                      </a:solidFill>
-                      <a:prstDash val="solid"/>
-                      <a:round/>
-                      <a:headEnd type="none" w="med" len="med"/>
-                      <a:tailEnd type="none" w="med" len="med"/>
-                    </a:lnT>
-                    <a:lnB w="6350" cap="flat" cmpd="sng" algn="ctr">
-                      <a:solidFill>
-                        <a:srgbClr val="CBD5E1"/>
-                      </a:solidFill>
-                      <a:prstDash val="solid"/>
-                      <a:round/>
-                      <a:headEnd type="none" w="med" len="med"/>
-                      <a:tailEnd type="none" w="med" len="med"/>
-                    </a:lnB>
-                    <a:solidFill>
-                      <a:srgbClr val="E8EFF8"/>
-                    </a:solidFill>
-                  </a:tcPr>
-                </a:tc>
-                <a:tc>
-                  <a:txBody>
-                    <a:bodyPr/>
-                    <a:lstStyle/>
-                    <a:p>
-                      <a:pPr indent="0" marL="0">
-                        <a:buNone/>
-                      </a:pPr>
-                      <a:r>
-                        <a:rPr lang="en-US" sz="900" dirty="0">
-                          <a:solidFill>
-                            <a:srgbClr val="64748B"/>
-                          </a:solidFill>
-                          <a:latin typeface="Arial" pitchFamily="34" charset="0"/>
-                          <a:ea typeface="Arial" pitchFamily="34" charset="-122"/>
-                          <a:cs typeface="Arial" pitchFamily="34" charset="-120"/>
-                        </a:rPr>
-                        <a:t>線路近くだったので、朝４：３０の貨物列車の音で目が覚めた（やむを得ないなと思う程</a:t>
-                      </a:r>
-                      <a:endParaRPr lang="en-US" sz="900" dirty="0">
-                        <a:latin typeface="Arial" charset="0"/>
-                        <a:ea typeface="Arial" charset="0"/>
-                        <a:cs typeface="Arial" charset="0"/>
-                      </a:endParaRPr>
-                    </a:p>
-                  </a:txBody>
-                  <a:tcPr marL="91440" marR="91440" marT="45720" marB="45720">
-                    <a:lnL w="6350" cap="flat" cmpd="sng" algn="ctr">
-                      <a:solidFill>
-                        <a:srgbClr val="CBD5E1"/>
-                      </a:solidFill>
-                      <a:prstDash val="solid"/>
-                      <a:round/>
-                      <a:headEnd type="none" w="med" len="med"/>
-                      <a:tailEnd type="none" w="med" len="med"/>
-                    </a:lnL>
-                    <a:lnR w="6350" cap="flat" cmpd="sng" algn="ctr">
-                      <a:solidFill>
-                        <a:srgbClr val="CBD5E1"/>
-                      </a:solidFill>
-                      <a:prstDash val="solid"/>
-                      <a:round/>
-                      <a:headEnd type="none" w="med" len="med"/>
-                      <a:tailEnd type="none" w="med" len="med"/>
-                    </a:lnR>
-                    <a:lnT w="6350" cap="flat" cmpd="sng" algn="ctr">
-                      <a:solidFill>
-                        <a:srgbClr val="CBD5E1"/>
-                      </a:solidFill>
-                      <a:prstDash val="solid"/>
-                      <a:round/>
-                      <a:headEnd type="none" w="med" len="med"/>
-                      <a:tailEnd type="none" w="med" len="med"/>
-                    </a:lnT>
-                    <a:lnB w="6350" cap="flat" cmpd="sng" algn="ctr">
-                      <a:solidFill>
-                        <a:srgbClr val="CBD5E1"/>
-                      </a:solidFill>
-                      <a:prstDash val="solid"/>
-                      <a:round/>
-                      <a:headEnd type="none" w="med" len="med"/>
-                      <a:tailEnd type="none" w="med" len="med"/>
-                    </a:lnB>
-                    <a:solidFill>
-                      <a:srgbClr val="E8EFF8"/>
-                    </a:solidFill>
-                  </a:tcPr>
-                </a:tc>
-                <a:tc>
-                  <a:txBody>
-                    <a:bodyPr/>
-                    <a:lstStyle/>
-                    <a:p>
-                      <a:pPr algn="ctr" indent="0" marL="0">
-                        <a:buNone/>
-                      </a:pPr>
-                      <a:r>
-                        <a:rPr lang="en-US" sz="900" dirty="0">
-                          <a:solidFill>
-                            <a:srgbClr val="334155"/>
-                          </a:solidFill>
-                          <a:latin typeface="Arial" pitchFamily="34" charset="0"/>
-                          <a:ea typeface="Arial" pitchFamily="34" charset="-122"/>
-                          <a:cs typeface="Arial" pitchFamily="34" charset="-120"/>
-                        </a:rPr>
-                        <a:t>2件</a:t>
-                      </a:r>
-                      <a:endParaRPr lang="en-US" sz="900" dirty="0">
-                        <a:latin typeface="Arial" charset="0"/>
-                        <a:ea typeface="Arial" charset="0"/>
-                        <a:cs typeface="Arial" charset="0"/>
-                      </a:endParaRPr>
-                    </a:p>
-                  </a:txBody>
-                  <a:tcPr marL="91440" marR="91440" marT="45720" marB="45720">
-                    <a:lnL w="6350" cap="flat" cmpd="sng" algn="ctr">
-                      <a:solidFill>
-                        <a:srgbClr val="CBD5E1"/>
-                      </a:solidFill>
-                      <a:prstDash val="solid"/>
-                      <a:round/>
-                      <a:headEnd type="none" w="med" len="med"/>
-                      <a:tailEnd type="none" w="med" len="med"/>
-                    </a:lnL>
-                    <a:lnR w="6350" cap="flat" cmpd="sng" algn="ctr">
-                      <a:solidFill>
-                        <a:srgbClr val="CBD5E1"/>
-                      </a:solidFill>
-                      <a:prstDash val="solid"/>
-                      <a:round/>
-                      <a:headEnd type="none" w="med" len="med"/>
-                      <a:tailEnd type="none" w="med" len="med"/>
-                    </a:lnR>
-                    <a:lnT w="6350" cap="flat" cmpd="sng" algn="ctr">
-                      <a:solidFill>
-                        <a:srgbClr val="CBD5E1"/>
-                      </a:solidFill>
-                      <a:prstDash val="solid"/>
-                      <a:round/>
-                      <a:headEnd type="none" w="med" len="med"/>
-                      <a:tailEnd type="none" w="med" len="med"/>
-                    </a:lnT>
-                    <a:lnB w="6350" cap="flat" cmpd="sng" algn="ctr">
-                      <a:solidFill>
-                        <a:srgbClr val="CBD5E1"/>
-                      </a:solidFill>
-                      <a:prstDash val="solid"/>
-                      <a:round/>
-                      <a:headEnd type="none" w="med" len="med"/>
-                      <a:tailEnd type="none" w="med" len="med"/>
-                    </a:lnB>
-                    <a:solidFill>
-                      <a:srgbClr val="E8EFF8"/>
-                    </a:solidFill>
-                  </a:tcPr>
-                </a:tc>
-              </a:tr>
-              <a:tr h="320040">
-                <a:tc>
-                  <a:txBody>
-                    <a:bodyPr/>
-                    <a:lstStyle/>
-                    <a:p>
-                      <a:pPr algn="ctr" indent="0" marL="0">
-                        <a:buNone/>
-                      </a:pPr>
-                      <a:r>
-                        <a:rPr lang="en-US" sz="1200" b="1" dirty="0">
-                          <a:solidFill>
-                            <a:srgbClr val="EA580C"/>
-                          </a:solidFill>
-                          <a:latin typeface="Arial" pitchFamily="34" charset="0"/>
-                          <a:ea typeface="Arial" pitchFamily="34" charset="-122"/>
-                          <a:cs typeface="Arial" pitchFamily="34" charset="-120"/>
-                        </a:rPr>
-                        <a:t>A</a:t>
-                      </a:r>
-                      <a:endParaRPr lang="en-US" sz="1200" dirty="0">
-                        <a:latin typeface="Arial" charset="0"/>
-                        <a:ea typeface="Arial" charset="0"/>
-                        <a:cs typeface="Arial" charset="0"/>
-                      </a:endParaRPr>
-                    </a:p>
-                  </a:txBody>
-                  <a:tcPr marL="91440" marR="91440" marT="45720" marB="45720">
-                    <a:lnL w="6350" cap="flat" cmpd="sng" algn="ctr">
-                      <a:solidFill>
-                        <a:srgbClr val="CBD5E1"/>
-                      </a:solidFill>
-                      <a:prstDash val="solid"/>
-                      <a:round/>
-                      <a:headEnd type="none" w="med" len="med"/>
-                      <a:tailEnd type="none" w="med" len="med"/>
-                    </a:lnL>
-                    <a:lnR w="6350" cap="flat" cmpd="sng" algn="ctr">
-                      <a:solidFill>
-                        <a:srgbClr val="CBD5E1"/>
-                      </a:solidFill>
-                      <a:prstDash val="solid"/>
-                      <a:round/>
-                      <a:headEnd type="none" w="med" len="med"/>
-                      <a:tailEnd type="none" w="med" len="med"/>
-                    </a:lnR>
-                    <a:lnT w="6350" cap="flat" cmpd="sng" algn="ctr">
-                      <a:solidFill>
-                        <a:srgbClr val="CBD5E1"/>
-                      </a:solidFill>
-                      <a:prstDash val="solid"/>
-                      <a:round/>
-                      <a:headEnd type="none" w="med" len="med"/>
-                      <a:tailEnd type="none" w="med" len="med"/>
-                    </a:lnT>
-                    <a:lnB w="6350" cap="flat" cmpd="sng" algn="ctr">
-                      <a:solidFill>
-                        <a:srgbClr val="CBD5E1"/>
-                      </a:solidFill>
-                      <a:prstDash val="solid"/>
-                      <a:round/>
-                      <a:headEnd type="none" w="med" len="med"/>
-                      <a:tailEnd type="none" w="med" len="med"/>
-                    </a:lnB>
-                    <a:solidFill>
-                      <a:srgbClr val="FFFFFF"/>
-                    </a:solidFill>
-                  </a:tcPr>
-                </a:tc>
-                <a:tc>
-                  <a:txBody>
-                    <a:bodyPr/>
-                    <a:lstStyle/>
-                    <a:p>
-                      <a:pPr indent="0" marL="0">
-                        <a:buNone/>
-                      </a:pPr>
-                      <a:r>
-                        <a:rPr lang="en-US" sz="900" b="1" dirty="0">
-                          <a:solidFill>
-                            <a:srgbClr val="334155"/>
-                          </a:solidFill>
-                          <a:latin typeface="Arial" pitchFamily="34" charset="0"/>
-                          <a:ea typeface="Arial" pitchFamily="34" charset="-122"/>
-                          <a:cs typeface="Arial" pitchFamily="34" charset="-120"/>
-                        </a:rPr>
-                        <a:t>水回り</a:t>
-                      </a:r>
-                      <a:endParaRPr lang="en-US" sz="900" dirty="0">
-                        <a:latin typeface="Arial" charset="0"/>
-                        <a:ea typeface="Arial" charset="0"/>
-                        <a:cs typeface="Arial" charset="0"/>
-                      </a:endParaRPr>
-                    </a:p>
-                  </a:txBody>
-                  <a:tcPr marL="91440" marR="91440" marT="45720" marB="45720">
-                    <a:lnL w="6350" cap="flat" cmpd="sng" algn="ctr">
-                      <a:solidFill>
-                        <a:srgbClr val="CBD5E1"/>
-                      </a:solidFill>
-                      <a:prstDash val="solid"/>
-                      <a:round/>
-                      <a:headEnd type="none" w="med" len="med"/>
-                      <a:tailEnd type="none" w="med" len="med"/>
-                    </a:lnL>
-                    <a:lnR w="6350" cap="flat" cmpd="sng" algn="ctr">
-                      <a:solidFill>
-                        <a:srgbClr val="CBD5E1"/>
-                      </a:solidFill>
-                      <a:prstDash val="solid"/>
-                      <a:round/>
-                      <a:headEnd type="none" w="med" len="med"/>
-                      <a:tailEnd type="none" w="med" len="med"/>
-                    </a:lnR>
-                    <a:lnT w="6350" cap="flat" cmpd="sng" algn="ctr">
-                      <a:solidFill>
-                        <a:srgbClr val="CBD5E1"/>
-                      </a:solidFill>
-                      <a:prstDash val="solid"/>
-                      <a:round/>
-                      <a:headEnd type="none" w="med" len="med"/>
-                      <a:tailEnd type="none" w="med" len="med"/>
-                    </a:lnT>
-                    <a:lnB w="6350" cap="flat" cmpd="sng" algn="ctr">
-                      <a:solidFill>
-                        <a:srgbClr val="CBD5E1"/>
-                      </a:solidFill>
-                      <a:prstDash val="solid"/>
-                      <a:round/>
-                      <a:headEnd type="none" w="med" len="med"/>
-                      <a:tailEnd type="none" w="med" len="med"/>
-                    </a:lnB>
-                    <a:solidFill>
-                      <a:srgbClr val="FFFFFF"/>
-                    </a:solidFill>
-                  </a:tcPr>
-                </a:tc>
-                <a:tc>
-                  <a:txBody>
-                    <a:bodyPr/>
-                    <a:lstStyle/>
-                    <a:p>
-                      <a:pPr indent="0" marL="0">
-                        <a:buNone/>
-                      </a:pPr>
-                      <a:r>
-                        <a:rPr lang="en-US" sz="900" dirty="0">
-                          <a:solidFill>
-                            <a:srgbClr val="64748B"/>
-                          </a:solidFill>
-                          <a:latin typeface="Arial" pitchFamily="34" charset="0"/>
-                          <a:ea typeface="Arial" pitchFamily="34" charset="-122"/>
-                          <a:cs typeface="Arial" pitchFamily="34" charset="-120"/>
-                        </a:rPr>
-                        <a:t>お風呂の時間が夜の9時〜だったので、すぐに行ったけど満員ではいれず、眠かったので</a:t>
-                      </a:r>
-                      <a:endParaRPr lang="en-US" sz="900" dirty="0">
-                        <a:latin typeface="Arial" charset="0"/>
-                        <a:ea typeface="Arial" charset="0"/>
-                        <a:cs typeface="Arial" charset="0"/>
-                      </a:endParaRPr>
-                    </a:p>
-                  </a:txBody>
-                  <a:tcPr marL="91440" marR="91440" marT="45720" marB="45720">
-                    <a:lnL w="6350" cap="flat" cmpd="sng" algn="ctr">
-                      <a:solidFill>
-                        <a:srgbClr val="CBD5E1"/>
-                      </a:solidFill>
-                      <a:prstDash val="solid"/>
-                      <a:round/>
-                      <a:headEnd type="none" w="med" len="med"/>
-                      <a:tailEnd type="none" w="med" len="med"/>
-                    </a:lnL>
-                    <a:lnR w="6350" cap="flat" cmpd="sng" algn="ctr">
-                      <a:solidFill>
-                        <a:srgbClr val="CBD5E1"/>
-                      </a:solidFill>
-                      <a:prstDash val="solid"/>
-                      <a:round/>
-                      <a:headEnd type="none" w="med" len="med"/>
-                      <a:tailEnd type="none" w="med" len="med"/>
-                    </a:lnR>
-                    <a:lnT w="6350" cap="flat" cmpd="sng" algn="ctr">
-                      <a:solidFill>
-                        <a:srgbClr val="CBD5E1"/>
-                      </a:solidFill>
-                      <a:prstDash val="solid"/>
-                      <a:round/>
-                      <a:headEnd type="none" w="med" len="med"/>
-                      <a:tailEnd type="none" w="med" len="med"/>
-                    </a:lnT>
-                    <a:lnB w="6350" cap="flat" cmpd="sng" algn="ctr">
-                      <a:solidFill>
-                        <a:srgbClr val="CBD5E1"/>
-                      </a:solidFill>
-                      <a:prstDash val="solid"/>
-                      <a:round/>
-                      <a:headEnd type="none" w="med" len="med"/>
-                      <a:tailEnd type="none" w="med" len="med"/>
-                    </a:lnB>
-                    <a:solidFill>
-                      <a:srgbClr val="FFFFFF"/>
-                    </a:solidFill>
-                  </a:tcPr>
-                </a:tc>
-                <a:tc>
-                  <a:txBody>
-                    <a:bodyPr/>
-                    <a:lstStyle/>
-                    <a:p>
-                      <a:pPr algn="ctr" indent="0" marL="0">
-                        <a:buNone/>
-                      </a:pPr>
-                      <a:r>
-                        <a:rPr lang="en-US" sz="900" dirty="0">
-                          <a:solidFill>
-                            <a:srgbClr val="334155"/>
-                          </a:solidFill>
-                          <a:latin typeface="Arial" pitchFamily="34" charset="0"/>
-                          <a:ea typeface="Arial" pitchFamily="34" charset="-122"/>
-                          <a:cs typeface="Arial" pitchFamily="34" charset="-120"/>
-                        </a:rPr>
-                        <a:t>2件</a:t>
-                      </a:r>
-                      <a:endParaRPr lang="en-US" sz="900" dirty="0">
-                        <a:latin typeface="Arial" charset="0"/>
-                        <a:ea typeface="Arial" charset="0"/>
-                        <a:cs typeface="Arial" charset="0"/>
-                      </a:endParaRPr>
-                    </a:p>
-                  </a:txBody>
-                  <a:tcPr marL="91440" marR="91440" marT="45720" marB="45720">
-                    <a:lnL w="6350" cap="flat" cmpd="sng" algn="ctr">
-                      <a:solidFill>
-                        <a:srgbClr val="CBD5E1"/>
-                      </a:solidFill>
-                      <a:prstDash val="solid"/>
-                      <a:round/>
-                      <a:headEnd type="none" w="med" len="med"/>
-                      <a:tailEnd type="none" w="med" len="med"/>
-                    </a:lnL>
-                    <a:lnR w="6350" cap="flat" cmpd="sng" algn="ctr">
-                      <a:solidFill>
-                        <a:srgbClr val="CBD5E1"/>
-                      </a:solidFill>
-                      <a:prstDash val="solid"/>
-                      <a:round/>
-                      <a:headEnd type="none" w="med" len="med"/>
-                      <a:tailEnd type="none" w="med" len="med"/>
-                    </a:lnR>
-                    <a:lnT w="6350" cap="flat" cmpd="sng" algn="ctr">
-                      <a:solidFill>
-                        <a:srgbClr val="CBD5E1"/>
-                      </a:solidFill>
-                      <a:prstDash val="solid"/>
-                      <a:round/>
-                      <a:headEnd type="none" w="med" len="med"/>
-                      <a:tailEnd type="none" w="med" len="med"/>
-                    </a:lnT>
-                    <a:lnB w="6350" cap="flat" cmpd="sng" algn="ctr">
-                      <a:solidFill>
-                        <a:srgbClr val="CBD5E1"/>
-                      </a:solidFill>
-                      <a:prstDash val="solid"/>
-                      <a:round/>
-                      <a:headEnd type="none" w="med" len="med"/>
-                      <a:tailEnd type="none" w="med" len="med"/>
-                    </a:lnB>
-                    <a:solidFill>
-                      <a:srgbClr val="FFFFFF"/>
-                    </a:solidFill>
-                  </a:tcPr>
-                </a:tc>
-              </a:tr>
-              <a:tr h="320040">
-                <a:tc>
-                  <a:txBody>
-                    <a:bodyPr/>
-                    <a:lstStyle/>
-                    <a:p>
-                      <a:pPr algn="ctr" indent="0" marL="0">
-                        <a:buNone/>
-                      </a:pPr>
-                      <a:r>
-                        <a:rPr lang="en-US" sz="1200" b="1" dirty="0">
-                          <a:solidFill>
                             <a:srgbClr val="D4A843"/>
                           </a:solidFill>
                           <a:latin typeface="Arial" pitchFamily="34" charset="0"/>
@@ -11614,7 +11032,7 @@
                 <a:ea typeface="Arial" pitchFamily="34" charset="-122"/>
                 <a:cs typeface="Arial" pitchFamily="34" charset="-120"/>
               </a:rPr>
-              <a:t>(1) 騒音対策の即時対応</a:t>
+              <a:t>(1) サービス品質全般の向上</a:t>
             </a:r>
             <a:endParaRPr lang="en-US" sz="1200" dirty="0"/>
           </a:p>
@@ -11657,7 +11075,7 @@
                 <a:ea typeface="Arial" pitchFamily="34" charset="-122"/>
                 <a:cs typeface="Arial" pitchFamily="34" charset="-120"/>
               </a:rPr>
-              <a:t>防音対策済み部屋の積極的案内</a:t>
+              <a:t>口コミへの返信率100%達成（48時間以内）</a:t>
             </a:r>
             <a:endParaRPr lang="en-US" sz="900" dirty="0"/>
           </a:p>
@@ -11678,7 +11096,7 @@
                 <a:ea typeface="Arial" pitchFamily="34" charset="-122"/>
                 <a:cs typeface="Arial" pitchFamily="34" charset="-120"/>
               </a:rPr>
-              <a:t>チェックイン時の防音耳栓提供</a:t>
+              <a:t>チェックイン・チェックアウト対応の効率化</a:t>
             </a:r>
             <a:endParaRPr lang="en-US" sz="900" dirty="0"/>
           </a:p>
@@ -11699,7 +11117,7 @@
                 <a:ea typeface="Arial" pitchFamily="34" charset="-122"/>
                 <a:cs typeface="Arial" pitchFamily="34" charset="-120"/>
               </a:rPr>
-              <a:t>騒音クレーム対応マニュアルの整備</a:t>
+              <a:t>フロントスタッフへのCS向上研修実施</a:t>
             </a:r>
             <a:endParaRPr lang="en-US" sz="900" dirty="0"/>
           </a:p>
@@ -11720,7 +11138,7 @@
                 <a:ea typeface="Arial" pitchFamily="34" charset="-122"/>
                 <a:cs typeface="Arial" pitchFamily="34" charset="-120"/>
               </a:rPr>
-              <a:t>防音性能の高い部屋への優先アサイン</a:t>
+              <a:t>お客様満足度アンケートの配布と集計体制整備</a:t>
             </a:r>
             <a:endParaRPr lang="en-US" sz="900" dirty="0"/>
           </a:p>
@@ -11806,7 +11224,7 @@
                 <a:ea typeface="Arial" pitchFamily="34" charset="-122"/>
                 <a:cs typeface="Arial" pitchFamily="34" charset="-120"/>
               </a:rPr>
-              <a:t>(2) 水回り不具合の即時対応</a:t>
+              <a:t>(2) 口コミ返信率100%の実現</a:t>
             </a:r>
             <a:endParaRPr lang="en-US" sz="1200" dirty="0"/>
           </a:p>
@@ -11821,198 +11239,6 @@
         <p:spPr>
           <a:xfrm>
             <a:off x="4800600" y="1600200"/>
-            <a:ext cx="3657600" cy="1188720"/>
-          </a:xfrm>
-          <a:prstGeom prst="rect">
-            <a:avLst/>
-          </a:prstGeom>
-          <a:noFill/>
-          <a:ln/>
-        </p:spPr>
-        <p:txBody>
-          <a:bodyPr wrap="square" lIns="0" tIns="0" rIns="0" bIns="0" rtlCol="0" anchor="ctr"/>
-          <a:lstStyle/>
-          <a:p>
-            <a:pPr marL="342900" indent="-342900">
-              <a:spcAft>
-                <a:spcPts val="300"/>
-              </a:spcAft>
-              <a:buSzPct val="100000"/>
-              <a:buChar char="•"/>
-            </a:pPr>
-            <a:r>
-              <a:rPr lang="en-US" sz="900" dirty="0">
-                <a:solidFill>
-                  <a:srgbClr val="334155"/>
-                </a:solidFill>
-                <a:latin typeface="Arial" pitchFamily="34" charset="0"/>
-                <a:ea typeface="Arial" pitchFamily="34" charset="-122"/>
-                <a:cs typeface="Arial" pitchFamily="34" charset="-120"/>
-              </a:rPr>
-              <a:t>水回り点検チェックリストの強化</a:t>
-            </a:r>
-            <a:endParaRPr lang="en-US" sz="900" dirty="0"/>
-          </a:p>
-          <a:p>
-            <a:pPr marL="342900" indent="-342900">
-              <a:spcAft>
-                <a:spcPts val="300"/>
-              </a:spcAft>
-              <a:buSzPct val="100000"/>
-              <a:buChar char="•"/>
-            </a:pPr>
-            <a:r>
-              <a:rPr lang="en-US" sz="900" dirty="0">
-                <a:solidFill>
-                  <a:srgbClr val="334155"/>
-                </a:solidFill>
-                <a:latin typeface="Arial" pitchFamily="34" charset="0"/>
-                <a:ea typeface="Arial" pitchFamily="34" charset="-122"/>
-                <a:cs typeface="Arial" pitchFamily="34" charset="-120"/>
-              </a:rPr>
-              <a:t>排水・給水トラブルの優先対応フロー</a:t>
-            </a:r>
-            <a:endParaRPr lang="en-US" sz="900" dirty="0"/>
-          </a:p>
-          <a:p>
-            <a:pPr marL="342900" indent="-342900">
-              <a:spcAft>
-                <a:spcPts val="300"/>
-              </a:spcAft>
-              <a:buSzPct val="100000"/>
-              <a:buChar char="•"/>
-            </a:pPr>
-            <a:r>
-              <a:rPr lang="en-US" sz="900" dirty="0">
-                <a:solidFill>
-                  <a:srgbClr val="334155"/>
-                </a:solidFill>
-                <a:latin typeface="Arial" pitchFamily="34" charset="0"/>
-                <a:ea typeface="Arial" pitchFamily="34" charset="-122"/>
-                <a:cs typeface="Arial" pitchFamily="34" charset="-120"/>
-              </a:rPr>
-              <a:t>浴室清潔度の定期巡回チェック強化</a:t>
-            </a:r>
-            <a:endParaRPr lang="en-US" sz="900" dirty="0"/>
-          </a:p>
-          <a:p>
-            <a:pPr marL="342900" indent="-342900">
-              <a:spcAft>
-                <a:spcPts val="300"/>
-              </a:spcAft>
-              <a:buSzPct val="100000"/>
-              <a:buChar char="•"/>
-            </a:pPr>
-            <a:r>
-              <a:rPr lang="en-US" sz="900" dirty="0">
-                <a:solidFill>
-                  <a:srgbClr val="334155"/>
-                </a:solidFill>
-                <a:latin typeface="Arial" pitchFamily="34" charset="0"/>
-                <a:ea typeface="Arial" pitchFamily="34" charset="-122"/>
-                <a:cs typeface="Arial" pitchFamily="34" charset="-120"/>
-              </a:rPr>
-              <a:t>不具合報告専用の内線番号周知</a:t>
-            </a:r>
-            <a:endParaRPr lang="en-US" sz="900" dirty="0"/>
-          </a:p>
-        </p:txBody>
-      </p:sp>
-      <p:sp>
-        <p:nvSpPr>
-          <p:cNvPr id="14" name="Shape 12"/>
-          <p:cNvSpPr/>
-          <p:nvPr/>
-        </p:nvSpPr>
-        <p:spPr>
-          <a:xfrm>
-            <a:off x="457200" y="3017520"/>
-            <a:ext cx="3977640" cy="1600200"/>
-          </a:xfrm>
-          <a:prstGeom prst="rect">
-            <a:avLst/>
-          </a:prstGeom>
-          <a:solidFill>
-            <a:srgbClr val="FFFFFF"/>
-          </a:solidFill>
-          <a:ln/>
-          <a:effectLst>
-            <a:outerShdw sx="100000" sy="100000" kx="0" ky="0" algn="bl" rotWithShape="0" blurRad="50800" dist="25400" dir="8100000">
-              <a:srgbClr val="000000">
-                <a:alpha val="10000"/>
-              </a:srgbClr>
-            </a:outerShdw>
-          </a:effectLst>
-        </p:spPr>
-      </p:sp>
-      <p:sp>
-        <p:nvSpPr>
-          <p:cNvPr id="15" name="Shape 13"/>
-          <p:cNvSpPr/>
-          <p:nvPr/>
-        </p:nvSpPr>
-        <p:spPr>
-          <a:xfrm>
-            <a:off x="457200" y="3017520"/>
-            <a:ext cx="54864" cy="1600200"/>
-          </a:xfrm>
-          <a:prstGeom prst="rect">
-            <a:avLst/>
-          </a:prstGeom>
-          <a:solidFill>
-            <a:srgbClr val="3B7DD8"/>
-          </a:solidFill>
-          <a:ln/>
-        </p:spPr>
-      </p:sp>
-      <p:sp>
-        <p:nvSpPr>
-          <p:cNvPr id="16" name="Text 14"/>
-          <p:cNvSpPr/>
-          <p:nvPr/>
-        </p:nvSpPr>
-        <p:spPr>
-          <a:xfrm>
-            <a:off x="594360" y="3063240"/>
-            <a:ext cx="3657600" cy="320040"/>
-          </a:xfrm>
-          <a:prstGeom prst="rect">
-            <a:avLst/>
-          </a:prstGeom>
-          <a:noFill/>
-          <a:ln/>
-        </p:spPr>
-        <p:txBody>
-          <a:bodyPr wrap="square" lIns="0" tIns="0" rIns="0" bIns="0" rtlCol="0" anchor="ctr"/>
-          <a:lstStyle/>
-          <a:p>
-            <a:pPr indent="0" marL="0">
-              <a:buNone/>
-            </a:pPr>
-            <a:r>
-              <a:rPr lang="en-US" sz="1200" b="1" dirty="0">
-                <a:solidFill>
-                  <a:srgbClr val="1A2744"/>
-                </a:solidFill>
-                <a:latin typeface="Arial" pitchFamily="34" charset="0"/>
-                <a:ea typeface="Arial" pitchFamily="34" charset="-122"/>
-                <a:cs typeface="Arial" pitchFamily="34" charset="-120"/>
-              </a:rPr>
-              <a:t>(3) 口コミ返信率100%の実現</a:t>
-            </a:r>
-            <a:endParaRPr lang="en-US" sz="1200" dirty="0"/>
-          </a:p>
-        </p:txBody>
-      </p:sp>
-      <p:sp>
-        <p:nvSpPr>
-          <p:cNvPr id="17" name="Text 15"/>
-          <p:cNvSpPr/>
-          <p:nvPr/>
-        </p:nvSpPr>
-        <p:spPr>
-          <a:xfrm>
-            <a:off x="594360" y="3383280"/>
             <a:ext cx="3657600" cy="1188720"/>
           </a:xfrm>
           <a:prstGeom prst="rect">
@@ -12091,7 +11317,7 @@
       </p:sp>
       <p:sp>
         <p:nvSpPr>
-          <p:cNvPr id="18" name="Shape 16"/>
+          <p:cNvPr id="14" name="Shape 12"/>
           <p:cNvSpPr/>
           <p:nvPr/>
         </p:nvSpPr>
@@ -12111,7 +11337,7 @@
       </p:sp>
       <p:sp>
         <p:nvSpPr>
-          <p:cNvPr id="19" name="Text 17"/>
+          <p:cNvPr id="15" name="Text 13"/>
           <p:cNvSpPr/>
           <p:nvPr/>
         </p:nvSpPr>
@@ -12150,7 +11376,7 @@
       </p:sp>
       <p:sp>
         <p:nvSpPr>
-          <p:cNvPr id="20" name="Text 18"/>
+          <p:cNvPr id="16" name="Text 14"/>
           <p:cNvSpPr/>
           <p:nvPr/>
         </p:nvSpPr>
@@ -12436,7 +11662,7 @@
                 <a:ea typeface="Arial" pitchFamily="34" charset="-122"/>
                 <a:cs typeface="Arial" pitchFamily="34" charset="-120"/>
               </a:rPr>
-              <a:t>防音設備の強化</a:t>
+              <a:t>顧客体験向上の短期施策</a:t>
             </a:r>
             <a:endParaRPr lang="en-US" sz="1000" dirty="0"/>
           </a:p>
@@ -12479,7 +11705,7 @@
                 <a:ea typeface="Arial" pitchFamily="34" charset="-122"/>
                 <a:cs typeface="Arial" pitchFamily="34" charset="-120"/>
               </a:rPr>
-              <a:t>防音カーテン・防音パネルの設置計画</a:t>
+              <a:t>OTA写真・説明文の定期的な見直しと更新</a:t>
             </a:r>
             <a:endParaRPr lang="en-US" sz="900" dirty="0"/>
           </a:p>
@@ -12500,7 +11726,7 @@
                 <a:ea typeface="Arial" pitchFamily="34" charset="-122"/>
                 <a:cs typeface="Arial" pitchFamily="34" charset="-120"/>
               </a:rPr>
-              <a:t>騒音の多い部屋の用途転換検討</a:t>
+              <a:t>リピーター向け優待プログラムの検討</a:t>
             </a:r>
             <a:endParaRPr lang="en-US" sz="900" dirty="0"/>
           </a:p>
@@ -12521,7 +11747,7 @@
                 <a:ea typeface="Arial" pitchFamily="34" charset="-122"/>
                 <a:cs typeface="Arial" pitchFamily="34" charset="-120"/>
               </a:rPr>
-              <a:t>建物外部騒音対策の工事計画</a:t>
+              <a:t>多言語対応サービスの充実（英語・中国語）</a:t>
             </a:r>
             <a:endParaRPr lang="en-US" sz="900" dirty="0"/>
           </a:p>
@@ -12536,130 +11762,6 @@
         <p:spPr>
           <a:xfrm>
             <a:off x="640080" y="2505456"/>
-            <a:ext cx="3474720" cy="274320"/>
-          </a:xfrm>
-          <a:prstGeom prst="rect">
-            <a:avLst/>
-          </a:prstGeom>
-          <a:noFill/>
-          <a:ln/>
-        </p:spPr>
-        <p:txBody>
-          <a:bodyPr wrap="square" lIns="0" tIns="0" rIns="0" bIns="0" rtlCol="0" anchor="ctr"/>
-          <a:lstStyle/>
-          <a:p>
-            <a:pPr indent="0" marL="0">
-              <a:buNone/>
-            </a:pPr>
-            <a:r>
-              <a:rPr lang="en-US" sz="1000" b="1" dirty="0">
-                <a:solidFill>
-                  <a:srgbClr val="1A2744"/>
-                </a:solidFill>
-                <a:latin typeface="Arial" pitchFamily="34" charset="0"/>
-                <a:ea typeface="Arial" pitchFamily="34" charset="-122"/>
-                <a:cs typeface="Arial" pitchFamily="34" charset="-120"/>
-              </a:rPr>
-              <a:t>水回り設備の計画的更新</a:t>
-            </a:r>
-            <a:endParaRPr lang="en-US" sz="1000" dirty="0"/>
-          </a:p>
-        </p:txBody>
-      </p:sp>
-      <p:sp>
-        <p:nvSpPr>
-          <p:cNvPr id="11" name="Text 9"/>
-          <p:cNvSpPr/>
-          <p:nvPr/>
-        </p:nvSpPr>
-        <p:spPr>
-          <a:xfrm>
-            <a:off x="640080" y="2761488"/>
-            <a:ext cx="3474720" cy="694944"/>
-          </a:xfrm>
-          <a:prstGeom prst="rect">
-            <a:avLst/>
-          </a:prstGeom>
-          <a:noFill/>
-          <a:ln/>
-        </p:spPr>
-        <p:txBody>
-          <a:bodyPr wrap="square" lIns="0" tIns="0" rIns="0" bIns="0" rtlCol="0" anchor="ctr"/>
-          <a:lstStyle/>
-          <a:p>
-            <a:pPr marL="342900" indent="-342900">
-              <a:spcAft>
-                <a:spcPts val="200"/>
-              </a:spcAft>
-              <a:buSzPct val="100000"/>
-              <a:buChar char="•"/>
-            </a:pPr>
-            <a:r>
-              <a:rPr lang="en-US" sz="900" dirty="0">
-                <a:solidFill>
-                  <a:srgbClr val="64748B"/>
-                </a:solidFill>
-                <a:latin typeface="Arial" pitchFamily="34" charset="0"/>
-                <a:ea typeface="Arial" pitchFamily="34" charset="-122"/>
-                <a:cs typeface="Arial" pitchFamily="34" charset="-120"/>
-              </a:rPr>
-              <a:t>老朽化した給排水設備の交換計画</a:t>
-            </a:r>
-            <a:endParaRPr lang="en-US" sz="900" dirty="0"/>
-          </a:p>
-          <a:p>
-            <a:pPr marL="342900" indent="-342900">
-              <a:spcAft>
-                <a:spcPts val="200"/>
-              </a:spcAft>
-              <a:buSzPct val="100000"/>
-              <a:buChar char="•"/>
-            </a:pPr>
-            <a:r>
-              <a:rPr lang="en-US" sz="900" dirty="0">
-                <a:solidFill>
-                  <a:srgbClr val="64748B"/>
-                </a:solidFill>
-                <a:latin typeface="Arial" pitchFamily="34" charset="0"/>
-                <a:ea typeface="Arial" pitchFamily="34" charset="-122"/>
-                <a:cs typeface="Arial" pitchFamily="34" charset="-120"/>
-              </a:rPr>
-              <a:t>シャワーヘッド・蛇口等の節水型設備導入</a:t>
-            </a:r>
-            <a:endParaRPr lang="en-US" sz="900" dirty="0"/>
-          </a:p>
-          <a:p>
-            <a:pPr marL="342900" indent="-342900">
-              <a:spcAft>
-                <a:spcPts val="200"/>
-              </a:spcAft>
-              <a:buSzPct val="100000"/>
-              <a:buChar char="•"/>
-            </a:pPr>
-            <a:r>
-              <a:rPr lang="en-US" sz="900" dirty="0">
-                <a:solidFill>
-                  <a:srgbClr val="64748B"/>
-                </a:solidFill>
-                <a:latin typeface="Arial" pitchFamily="34" charset="0"/>
-                <a:ea typeface="Arial" pitchFamily="34" charset="-122"/>
-                <a:cs typeface="Arial" pitchFamily="34" charset="-120"/>
-              </a:rPr>
-              <a:t>定期メンテナンス契約の見直し</a:t>
-            </a:r>
-            <a:endParaRPr lang="en-US" sz="900" dirty="0"/>
-          </a:p>
-        </p:txBody>
-      </p:sp>
-      <p:sp>
-        <p:nvSpPr>
-          <p:cNvPr id="12" name="Text 10"/>
-          <p:cNvSpPr/>
-          <p:nvPr/>
-        </p:nvSpPr>
-        <p:spPr>
-          <a:xfrm>
-            <a:off x="640080" y="3547872"/>
             <a:ext cx="3474720" cy="274320"/>
           </a:xfrm>
           <a:prstGeom prst="rect">
@@ -12692,13 +11794,13 @@
       </p:sp>
       <p:sp>
         <p:nvSpPr>
-          <p:cNvPr id="13" name="Text 11"/>
-          <p:cNvSpPr/>
-          <p:nvPr/>
-        </p:nvSpPr>
-        <p:spPr>
-          <a:xfrm>
-            <a:off x="640080" y="3803904"/>
+          <p:cNvPr id="11" name="Text 9"/>
+          <p:cNvSpPr/>
+          <p:nvPr/>
+        </p:nvSpPr>
+        <p:spPr>
+          <a:xfrm>
+            <a:off x="640080" y="2761488"/>
             <a:ext cx="3474720" cy="694944"/>
           </a:xfrm>
           <a:prstGeom prst="rect">
@@ -12777,7 +11879,7 @@
       </p:sp>
       <p:sp>
         <p:nvSpPr>
-          <p:cNvPr id="14" name="Shape 12"/>
+          <p:cNvPr id="12" name="Shape 10"/>
           <p:cNvSpPr/>
           <p:nvPr/>
         </p:nvSpPr>
@@ -12804,7 +11906,7 @@
       </p:sp>
       <p:sp>
         <p:nvSpPr>
-          <p:cNvPr id="15" name="Shape 13"/>
+          <p:cNvPr id="13" name="Shape 11"/>
           <p:cNvSpPr/>
           <p:nvPr/>
         </p:nvSpPr>
@@ -12824,7 +11926,7 @@
       </p:sp>
       <p:sp>
         <p:nvSpPr>
-          <p:cNvPr id="16" name="Text 14"/>
+          <p:cNvPr id="14" name="Text 12"/>
           <p:cNvSpPr/>
           <p:nvPr/>
         </p:nvSpPr>
@@ -12863,7 +11965,7 @@
       </p:sp>
       <p:sp>
         <p:nvSpPr>
-          <p:cNvPr id="17" name="Text 15"/>
+          <p:cNvPr id="15" name="Text 13"/>
           <p:cNvSpPr/>
           <p:nvPr/>
         </p:nvSpPr>
@@ -12902,7 +12004,7 @@
       </p:sp>
       <p:sp>
         <p:nvSpPr>
-          <p:cNvPr id="18" name="Text 16"/>
+          <p:cNvPr id="16" name="Text 14"/>
           <p:cNvSpPr/>
           <p:nvPr/>
         </p:nvSpPr>
@@ -12987,7 +12089,7 @@
       </p:sp>
       <p:sp>
         <p:nvSpPr>
-          <p:cNvPr id="19" name="Text 17"/>
+          <p:cNvPr id="17" name="Text 15"/>
           <p:cNvSpPr/>
           <p:nvPr/>
         </p:nvSpPr>
@@ -13026,7 +12128,7 @@
       </p:sp>
       <p:sp>
         <p:nvSpPr>
-          <p:cNvPr id="20" name="Text 18"/>
+          <p:cNvPr id="18" name="Text 16"/>
           <p:cNvSpPr/>
           <p:nvPr/>
         </p:nvSpPr>
@@ -13111,7 +12213,7 @@
       </p:sp>
       <p:sp>
         <p:nvSpPr>
-          <p:cNvPr id="21" name="Text 19"/>
+          <p:cNvPr id="19" name="Text 17"/>
           <p:cNvSpPr/>
           <p:nvPr/>
         </p:nvSpPr>
@@ -13150,7 +12252,7 @@
       </p:sp>
       <p:sp>
         <p:nvSpPr>
-          <p:cNvPr id="22" name="Text 20"/>
+          <p:cNvPr id="20" name="Text 18"/>
           <p:cNvSpPr/>
           <p:nvPr/>
         </p:nvSpPr>
@@ -13235,7 +12337,7 @@
       </p:sp>
       <p:sp>
         <p:nvSpPr>
-          <p:cNvPr id="23" name="Shape 21"/>
+          <p:cNvPr id="21" name="Shape 19"/>
           <p:cNvSpPr/>
           <p:nvPr/>
         </p:nvSpPr>
@@ -13255,7 +12357,7 @@
       </p:sp>
       <p:sp>
         <p:nvSpPr>
-          <p:cNvPr id="24" name="Text 22"/>
+          <p:cNvPr id="22" name="Text 20"/>
           <p:cNvSpPr/>
           <p:nvPr/>
         </p:nvSpPr>
@@ -13294,7 +12396,7 @@
       </p:sp>
       <p:sp>
         <p:nvSpPr>
-          <p:cNvPr id="25" name="Text 23"/>
+          <p:cNvPr id="23" name="Text 21"/>
           <p:cNvSpPr/>
           <p:nvPr/>
         </p:nvSpPr>
@@ -13849,7 +12951,7 @@
                           <a:ea typeface="Arial" pitchFamily="34" charset="-122"/>
                           <a:cs typeface="Arial" pitchFamily="34" charset="-120"/>
                         </a:rPr>
-                        <a:t>8.22点</a:t>
+                        <a:t>8.00点</a:t>
                       </a:r>
                       <a:endParaRPr lang="en-US" sz="1000" dirty="0">
                         <a:latin typeface="Arial" charset="0"/>
@@ -13917,7 +13019,7 @@
                           <a:ea typeface="Arial" pitchFamily="34" charset="-122"/>
                           <a:cs typeface="Arial" pitchFamily="34" charset="-120"/>
                         </a:rPr>
-                        <a:t>8.5点以上</a:t>
+                        <a:t>8.3点以上</a:t>
                       </a:r>
                       <a:endParaRPr lang="en-US" sz="1000" dirty="0">
                         <a:latin typeface="Arial" charset="0"/>
@@ -14123,7 +13225,7 @@
                           <a:ea typeface="Arial" pitchFamily="34" charset="-122"/>
                           <a:cs typeface="Arial" pitchFamily="34" charset="-120"/>
                         </a:rPr>
-                        <a:t>72.1%</a:t>
+                        <a:t>66.7%</a:t>
                       </a:r>
                       <a:endParaRPr lang="en-US" sz="1000" dirty="0">
                         <a:latin typeface="Arial" charset="0"/>
@@ -14191,7 +13293,7 @@
                           <a:ea typeface="Arial" pitchFamily="34" charset="-122"/>
                           <a:cs typeface="Arial" pitchFamily="34" charset="-120"/>
                         </a:rPr>
-                        <a:t>77%以上</a:t>
+                        <a:t>72%以上</a:t>
                       </a:r>
                       <a:endParaRPr lang="en-US" sz="1000" dirty="0">
                         <a:latin typeface="Arial" charset="0"/>
@@ -14397,7 +13499,7 @@
                           <a:ea typeface="Arial" pitchFamily="34" charset="-122"/>
                           <a:cs typeface="Arial" pitchFamily="34" charset="-120"/>
                         </a:rPr>
-                        <a:t>1.5%</a:t>
+                        <a:t>0.0%</a:t>
                       </a:r>
                       <a:endParaRPr lang="en-US" sz="1000" dirty="0">
                         <a:latin typeface="Arial" charset="0"/>
@@ -14465,7 +13567,7 @@
                           <a:ea typeface="Arial" pitchFamily="34" charset="-122"/>
                           <a:cs typeface="Arial" pitchFamily="34" charset="-120"/>
                         </a:rPr>
-                        <a:t>0.5%以下</a:t>
+                        <a:t>0%以下</a:t>
                       </a:r>
                       <a:endParaRPr lang="en-US" sz="1000" dirty="0">
                         <a:latin typeface="Arial" charset="0"/>
@@ -14877,7 +13979,7 @@
                           <a:ea typeface="Arial" pitchFamily="34" charset="-122"/>
                           <a:cs typeface="Arial" pitchFamily="34" charset="-120"/>
                         </a:rPr>
-                        <a:t>じゃらん評価</a:t>
+                        <a:t>Google評価</a:t>
                       </a:r>
                       <a:endParaRPr lang="en-US" sz="1000" dirty="0">
                         <a:latin typeface="Arial" charset="0"/>
@@ -14945,7 +14047,7 @@
                           <a:ea typeface="Arial" pitchFamily="34" charset="-122"/>
                           <a:cs typeface="Arial" pitchFamily="34" charset="-120"/>
                         </a:rPr>
-                        <a:t>4.45/5点</a:t>
+                        <a:t>4.33/5点</a:t>
                       </a:r>
                       <a:endParaRPr lang="en-US" sz="1000" dirty="0">
                         <a:latin typeface="Arial" charset="0"/>
@@ -15013,7 +14115,7 @@
                           <a:ea typeface="Arial" pitchFamily="34" charset="-122"/>
                           <a:cs typeface="Arial" pitchFamily="34" charset="-120"/>
                         </a:rPr>
-                        <a:t>4.7/5点以上</a:t>
+                        <a:t>4.5/5点以上</a:t>
                       </a:r>
                       <a:endParaRPr lang="en-US" sz="1000" dirty="0">
                         <a:latin typeface="Arial" charset="0"/>
@@ -15151,7 +14253,7 @@
                           <a:ea typeface="Arial" pitchFamily="34" charset="-122"/>
                           <a:cs typeface="Arial" pitchFamily="34" charset="-120"/>
                         </a:rPr>
-                        <a:t>Google評価</a:t>
+                        <a:t>Agoda評価</a:t>
                       </a:r>
                       <a:endParaRPr lang="en-US" sz="1000" dirty="0">
                         <a:latin typeface="Arial" charset="0"/>
@@ -15219,7 +14321,7 @@
                           <a:ea typeface="Arial" pitchFamily="34" charset="-122"/>
                           <a:cs typeface="Arial" pitchFamily="34" charset="-120"/>
                         </a:rPr>
-                        <a:t>4.38/5点</a:t>
+                        <a:t>8.17/10点</a:t>
                       </a:r>
                       <a:endParaRPr lang="en-US" sz="1000" dirty="0">
                         <a:latin typeface="Arial" charset="0"/>
@@ -15287,7 +14389,7 @@
                           <a:ea typeface="Arial" pitchFamily="34" charset="-122"/>
                           <a:cs typeface="Arial" pitchFamily="34" charset="-120"/>
                         </a:rPr>
-                        <a:t>4.6/5点以上</a:t>
+                        <a:t>8.4/10点以上</a:t>
                       </a:r>
                       <a:endParaRPr lang="en-US" sz="1000" dirty="0">
                         <a:latin typeface="Arial" charset="0"/>
@@ -15505,7 +14607,7 @@
                 <a:ea typeface="Arial" pitchFamily="34" charset="-122"/>
                 <a:cs typeface="Arial" pitchFamily="34" charset="-120"/>
               </a:rPr>
-              <a:t>月次でOTA評価スコアを確認し、騒音問題改善の進捗をトラッキングします。四半期ごとに目標値を見直し、継続的な改善サイクルを確立してください。</a:t>
+              <a:t>月次でOTA評価スコアを確認し、サービス全般改善の進捗をトラッキングします。四半期ごとに目標値を見直し、継続的な改善サイクルを確立してください。</a:t>
             </a:r>
             <a:endParaRPr lang="en-US" sz="1000" dirty="0"/>
           </a:p>
